--- a/deliverables/video-1-slides/out/Video-1-Reveal-Builds_v2.4.pptx
+++ b/deliverables/video-1-slides/out/Video-1-Reveal-Builds_v2.4.pptx
@@ -12241,7 +12241,7 @@
                 <a:ea typeface="Montserrat"/>
                 <a:cs typeface="Montserrat"/>
               </a:rPr>
-              <a:t>THE CAPABILITY FORMATION FIELD KIT</a:t>
+              <a:t>FREE CAREER EVIDENCE STARTER</a:t>
             </a:r>
           </a:p>
         </p:txBody>
@@ -12274,7 +12274,7 @@
               </a:lnSpc>
             </a:pPr>
             <a:r>
-              <a:rPr sz="3200" b="1" i="0">
+              <a:rPr sz="2900" b="1" i="0">
                 <a:solidFill>
                   <a:srgbClr val="0F2346"/>
                 </a:solidFill>
@@ -12282,11 +12282,11 @@
                 <a:ea typeface="Montserrat"/>
                 <a:cs typeface="Montserrat"/>
               </a:rPr>
-              <a:t>Is your job still</a:t>
+              <a:t>ONE ACCOMPLISHMENT →</a:t>
             </a:r>
             <a:br/>
             <a:r>
-              <a:rPr sz="3200" b="1" i="0">
+              <a:rPr sz="2900" b="1" i="0">
                 <a:solidFill>
                   <a:srgbClr val="0F2346"/>
                 </a:solidFill>
@@ -12294,7 +12294,7 @@
                 <a:ea typeface="Montserrat"/>
                 <a:cs typeface="Montserrat"/>
               </a:rPr>
-              <a:t>building you?</a:t>
+              <a:t>ONE PORTABLE PROOF LINE</a:t>
             </a:r>
           </a:p>
         </p:txBody>
@@ -12335,7 +12335,7 @@
                 <a:ea typeface="DM Sans"/>
                 <a:cs typeface="DM Sans"/>
               </a:rPr>
-              <a:t>Complete a private, evidence-led career position</a:t>
+              <a:t>Turn one accomplishment into proof you can use in a</a:t>
             </a:r>
             <a:br/>
             <a:r>
@@ -12347,7 +12347,7 @@
                 <a:ea typeface="DM Sans"/>
                 <a:cs typeface="DM Sans"/>
               </a:rPr>
-              <a:t>assessment using the last 90 days of your</a:t>
+              <a:t>performance review, interview, internal move or</a:t>
             </a:r>
             <a:br/>
             <a:r>
@@ -12359,7 +12359,7 @@
                 <a:ea typeface="DM Sans"/>
                 <a:cs typeface="DM Sans"/>
               </a:rPr>
-              <a:t>actual work.</a:t>
+              <a:t>career pivot.</a:t>
             </a:r>
           </a:p>
         </p:txBody>
@@ -12436,7 +12436,7 @@
               </a:lnSpc>
             </a:pPr>
             <a:r>
-              <a:rPr sz="2000" b="1" i="0">
+              <a:rPr sz="1400" b="1" i="0">
                 <a:solidFill>
                   <a:srgbClr val="F5F1E8"/>
                 </a:solidFill>
@@ -12444,7 +12444,7 @@
                 <a:ea typeface="Montserrat"/>
                 <a:cs typeface="Montserrat"/>
               </a:rPr>
-              <a:t>temidayoafonja.com/fieldkit</a:t>
+              <a:t>temidayoafonja.com/career-evidence-starter</a:t>
             </a:r>
           </a:p>
         </p:txBody>

--- a/deliverables/video-1-slides/out/Video-1-Reveal-Builds_v2.4.pptx
+++ b/deliverables/video-1-slides/out/Video-1-Reveal-Builds_v2.4.pptx
@@ -1431,7 +1431,7 @@
           </a:p>
           <a:p>
             <a:r>
-              <a:t>Field Kit invitation.</a:t>
+              <a:t>Career Evidence Starter invitation.</a:t>
             </a:r>
           </a:p>
         </p:txBody>
@@ -1518,7 +1518,7 @@
           </a:p>
           <a:p>
             <a:r>
-              <a:t>Field Kit invitation.</a:t>
+              <a:t>Career Evidence Starter invitation.</a:t>
             </a:r>
           </a:p>
         </p:txBody>
@@ -1704,7 +1704,7 @@
           </a:p>
           <a:p>
             <a:r>
-              <a:t>Field Kit invitation.</a:t>
+              <a:t>Career Evidence Starter invitation.</a:t>
             </a:r>
           </a:p>
         </p:txBody>
@@ -1786,28 +1786,25 @@
           <a:p/>
           <a:p>
             <a:r>
-              <a:t>"If these questions are showing you that you need a fuller reading of what</a:t>
-            </a:r>
-          </a:p>
-          <a:p>
-            <a:r>
-              <a:t>your current work is building, the Capability Formation Field Kit will help</a:t>
-            </a:r>
-          </a:p>
-          <a:p>
-            <a:r>
-              <a:t>you complete that assessment privately using evidence from the last 90</a:t>
-            </a:r>
-          </a:p>
-          <a:p>
-            <a:r>
-              <a:t>days."</a:t>
+              <a:t>"If you want to try this on one real accomplishment, I made a free Career Evidence Starter.</a:t>
             </a:r>
           </a:p>
           <a:p/>
           <a:p>
             <a:r>
-              <a:t>Keep the delivery calm and brief. This is the only purchase invitation in</a:t>
+              <a:t>It takes about 10 to 15 focused minutes and helps you turn one piece of work into a portable Proof Line.</a:t>
+            </a:r>
+          </a:p>
+          <a:p/>
+          <a:p>
+            <a:r>
+              <a:t>I’ve linked it below."</a:t>
+            </a:r>
+          </a:p>
+          <a:p/>
+          <a:p>
+            <a:r>
+              <a:t>Keep the delivery calm and brief. This is the only resource invitation in</a:t>
             </a:r>
           </a:p>
           <a:p>

--- a/deliverables/video-1-slides/out/Video-1-Reveal-Builds_v2.4.pptx
+++ b/deliverables/video-1-slides/out/Video-1-Reveal-Builds_v2.4.pptx
@@ -523,61 +523,27 @@
           <a:lstStyle/>
           <a:p>
             <a:r>
-              <a:t>Timing: 0:00-0:35</a:t>
-            </a:r>
-          </a:p>
-          <a:p/>
-          <a:p>
-            <a:r>
-              <a:t>Begin full-screen on Temidayo rather than on the slide.</a:t>
-            </a:r>
-          </a:p>
-          <a:p/>
-          <a:p>
-            <a:r>
-              <a:t>Exact opening:</a:t>
-            </a:r>
-          </a:p>
-          <a:p/>
-          <a:p>
-            <a:r>
-              <a:t>"If you are considering a different job, function or industry, one of the</a:t>
-            </a:r>
-          </a:p>
-          <a:p>
-            <a:r>
-              <a:t>hardest questions is whether the experience you already have will still</a:t>
-            </a:r>
-          </a:p>
-          <a:p>
-            <a:r>
-              <a:t>count. I have changed the kind of work I do several times without treating</a:t>
-            </a:r>
-          </a:p>
-          <a:p>
-            <a:r>
-              <a:t>each move as a return to zero. In this video, I will show you three</a:t>
-            </a:r>
-          </a:p>
-          <a:p>
-            <a:r>
-              <a:t>questions I use to identify what my experience has built, explain one</a:t>
-            </a:r>
-          </a:p>
-          <a:p>
-            <a:r>
-              <a:t>result in language another employer can understand and decide what</a:t>
-            </a:r>
-          </a:p>
-          <a:p>
-            <a:r>
-              <a:t>evidence to preserve before I move."</a:t>
-            </a:r>
-          </a:p>
-          <a:p/>
-          <a:p>
-            <a:r>
-              <a:t>Move to the title slide after introducing the three questions.</a:t>
+              <a:t>Single-state frame — main slide 1.</a:t>
+            </a:r>
+          </a:p>
+          <a:p>
+            <a:r>
+              <a:t>Timing: approximately 0:33 to 1:09.</a:t>
+            </a:r>
+          </a:p>
+          <a:p>
+            <a:r>
+              <a:t>Do NOT open on this slide. Begin full-screen on Temidayo and let the whole opening land: the hook, the correction, her roughly eighteen years across very different functions and industries, and the three-practice promise.</a:t>
+            </a:r>
+          </a:p>
+          <a:p>
+            <a:r>
+              <a:t>Bring the title up under the channel line, then the promise boundary: "And I want to be clear with you about the promise. Not everything transfers."</a:t>
+            </a:r>
+          </a:p>
+          <a:p>
+            <a:r>
+              <a:t>The on-screen deck title and the public YouTube title differ intentionally. Do not change the title slide to match the public title.</a:t>
             </a:r>
           </a:p>
         </p:txBody>
@@ -647,40 +613,32 @@
           <a:lstStyle/>
           <a:p>
             <a:r>
-              <a:t>Timing: 4:05-4:50</a:t>
-            </a:r>
-          </a:p>
-          <a:p/>
-          <a:p>
-            <a:r>
-              <a:t>Say:</a:t>
-            </a:r>
-          </a:p>
-          <a:p/>
-          <a:p>
-            <a:r>
-              <a:t>"One measure of how well new hires felt integrated moved from 47 to 75</a:t>
-            </a:r>
-          </a:p>
-          <a:p>
-            <a:r>
-              <a:t>after the onboarding redesign I led with my team. The number becomes</a:t>
-            </a:r>
-          </a:p>
-          <a:p>
-            <a:r>
-              <a:t>useful because I can explain what it measured, what changed and what I</a:t>
-            </a:r>
-          </a:p>
-          <a:p>
-            <a:r>
-              <a:t>was responsible for."</a:t>
-            </a:r>
-          </a:p>
-          <a:p/>
-          <a:p>
-            <a:r>
-              <a:t>Reveal 47 first, then 75.</a:t>
+              <a:t>Reveal frame 1 of 2 — main slide 7.</a:t>
+            </a:r>
+          </a:p>
+          <a:p>
+            <a:r>
+              <a:t>Timing: approximately 5:06.</a:t>
+            </a:r>
+          </a:p>
+          <a:p>
+            <a:r>
+              <a:t>The bounded result slide. Reveal 47, then 75.</a:t>
+            </a:r>
+          </a:p>
+          <a:p>
+            <a:r>
+              <a:t>FACTUAL BOUNDARY, spoken out loud and not to be trimmed: it was ONE measure of how well new hires felt integrated, not a claim about everything the redesign affected, and it was team-based work that Temidayo LED, not something she did alone.</a:t>
+            </a:r>
+          </a:p>
+          <a:p>
+            <a:r>
+              <a:t>Do not add the ~30% retention improvement or the &gt;$2M avoided-turnover figure. Neither is in this video and neither may appear in a graphic, caption or thumbnail.</a:t>
+            </a:r>
+          </a:p>
+          <a:p>
+            <a:r>
+              <a:t>Close on: portable evidence connects the situation, the contribution and what changed.</a:t>
             </a:r>
           </a:p>
         </p:txBody>
@@ -750,40 +708,32 @@
           <a:lstStyle/>
           <a:p>
             <a:r>
-              <a:t>Timing: 4:05-4:50</a:t>
-            </a:r>
-          </a:p>
-          <a:p/>
-          <a:p>
-            <a:r>
-              <a:t>Say:</a:t>
-            </a:r>
-          </a:p>
-          <a:p/>
-          <a:p>
-            <a:r>
-              <a:t>"One measure of how well new hires felt integrated moved from 47 to 75</a:t>
-            </a:r>
-          </a:p>
-          <a:p>
-            <a:r>
-              <a:t>after the onboarding redesign I led with my team. The number becomes</a:t>
-            </a:r>
-          </a:p>
-          <a:p>
-            <a:r>
-              <a:t>useful because I can explain what it measured, what changed and what I</a:t>
-            </a:r>
-          </a:p>
-          <a:p>
-            <a:r>
-              <a:t>was responsible for."</a:t>
-            </a:r>
-          </a:p>
-          <a:p/>
-          <a:p>
-            <a:r>
-              <a:t>Reveal 47 first, then 75.</a:t>
+              <a:t>Reveal frame 2 of 2 — main slide 7.</a:t>
+            </a:r>
+          </a:p>
+          <a:p>
+            <a:r>
+              <a:t>Timing: approximately 5:06.</a:t>
+            </a:r>
+          </a:p>
+          <a:p>
+            <a:r>
+              <a:t>The bounded result slide. Reveal 47, then 75.</a:t>
+            </a:r>
+          </a:p>
+          <a:p>
+            <a:r>
+              <a:t>FACTUAL BOUNDARY, spoken out loud and not to be trimmed: it was ONE measure of how well new hires felt integrated, not a claim about everything the redesign affected, and it was team-based work that Temidayo LED, not something she did alone.</a:t>
+            </a:r>
+          </a:p>
+          <a:p>
+            <a:r>
+              <a:t>Do not add the ~30% retention improvement or the &gt;$2M avoided-turnover figure. Neither is in this video and neither may appear in a graphic, caption or thumbnail.</a:t>
+            </a:r>
+          </a:p>
+          <a:p>
+            <a:r>
+              <a:t>Close on: portable evidence connects the situation, the contribution and what changed.</a:t>
             </a:r>
           </a:p>
         </p:txBody>
@@ -853,19 +803,17 @@
           <a:lstStyle/>
           <a:p>
             <a:r>
-              <a:t>Timing: 4:50-4:58</a:t>
-            </a:r>
-          </a:p>
-          <a:p/>
-          <a:p>
-            <a:r>
-              <a:t>A section break, four to seven seconds, while you name the third idea.</a:t>
-            </a:r>
-          </a:p>
-          <a:p/>
-          <a:p>
-            <a:r>
-              <a:t>Do not restate the first two. Move Three follows.</a:t>
+              <a:t>Single-state frame — main slide 8.</a:t>
+            </a:r>
+          </a:p>
+          <a:p>
+            <a:r>
+              <a:t>Timing: approximately 5:45, holding to about 5:50.</a:t>
+            </a:r>
+          </a:p>
+          <a:p>
+            <a:r>
+              <a:t>Section card. Hold briefly, then return to presenter.</a:t>
             </a:r>
           </a:p>
         </p:txBody>
@@ -935,35 +883,27 @@
           <a:lstStyle/>
           <a:p>
             <a:r>
-              <a:t>Timing: 4:58-6:25</a:t>
-            </a:r>
-          </a:p>
-          <a:p/>
-          <a:p>
-            <a:r>
-              <a:t>Explain that professionals often remember project names while losing the</a:t>
-            </a:r>
-          </a:p>
-          <a:p>
-            <a:r>
-              <a:t>evidence, context and explanation that make the work useful later.</a:t>
-            </a:r>
-          </a:p>
-          <a:p/>
-          <a:p>
-            <a:r>
-              <a:t>Teach the card one row at a time.</a:t>
-            </a:r>
-          </a:p>
-          <a:p/>
-          <a:p>
-            <a:r>
-              <a:t>Keep the account permitted and high level. Nothing confidential and no</a:t>
-            </a:r>
-          </a:p>
-          <a:p>
-            <a:r>
-              <a:t>employer-owned material.</a:t>
+              <a:t>Reveal frame 1 of 4 — main slide 9.</a:t>
+            </a:r>
+          </a:p>
+          <a:p>
+            <a:r>
+              <a:t>Timing: approximately 5:50.</a:t>
+            </a:r>
+          </a:p>
+          <a:p>
+            <a:r>
+              <a:t>Reveal the four lines: the situation, my role, what changed, what this shows.</a:t>
+            </a:r>
+          </a:p>
+          <a:p>
+            <a:r>
+              <a:t>The permitted-record boundary is spoken: nothing confidential, nothing employer-owned. Do not edit around it.</a:t>
+            </a:r>
+          </a:p>
+          <a:p>
+            <a:r>
+              <a:t>The narrowest-capability rule is the teaching point of this slide. Temidayo models it on herself and then extends it to the viewer: "I should not turn that into a claim that I can transform every employee experience problem, and I do not want you to overreach either." </a:t>
             </a:r>
           </a:p>
         </p:txBody>
@@ -1033,35 +973,27 @@
           <a:lstStyle/>
           <a:p>
             <a:r>
-              <a:t>Timing: 4:58-6:25</a:t>
-            </a:r>
-          </a:p>
-          <a:p/>
-          <a:p>
-            <a:r>
-              <a:t>Explain that professionals often remember project names while losing the</a:t>
-            </a:r>
-          </a:p>
-          <a:p>
-            <a:r>
-              <a:t>evidence, context and explanation that make the work useful later.</a:t>
-            </a:r>
-          </a:p>
-          <a:p/>
-          <a:p>
-            <a:r>
-              <a:t>Teach the card one row at a time.</a:t>
-            </a:r>
-          </a:p>
-          <a:p/>
-          <a:p>
-            <a:r>
-              <a:t>Keep the account permitted and high level. Nothing confidential and no</a:t>
-            </a:r>
-          </a:p>
-          <a:p>
-            <a:r>
-              <a:t>employer-owned material.</a:t>
+              <a:t>Reveal frame 2 of 4 — main slide 9.</a:t>
+            </a:r>
+          </a:p>
+          <a:p>
+            <a:r>
+              <a:t>Timing: approximately 5:50.</a:t>
+            </a:r>
+          </a:p>
+          <a:p>
+            <a:r>
+              <a:t>Reveal the four lines: the situation, my role, what changed, what this shows.</a:t>
+            </a:r>
+          </a:p>
+          <a:p>
+            <a:r>
+              <a:t>The permitted-record boundary is spoken: nothing confidential, nothing employer-owned. Do not edit around it.</a:t>
+            </a:r>
+          </a:p>
+          <a:p>
+            <a:r>
+              <a:t>The narrowest-capability rule is the teaching point of this slide. Temidayo models it on herself and then extends it to the viewer: "I should not turn that into a claim that I can transform every employee experience problem, and I do not want you to overreach either." </a:t>
             </a:r>
           </a:p>
         </p:txBody>
@@ -1131,35 +1063,27 @@
           <a:lstStyle/>
           <a:p>
             <a:r>
-              <a:t>Timing: 4:58-6:25</a:t>
-            </a:r>
-          </a:p>
-          <a:p/>
-          <a:p>
-            <a:r>
-              <a:t>Explain that professionals often remember project names while losing the</a:t>
-            </a:r>
-          </a:p>
-          <a:p>
-            <a:r>
-              <a:t>evidence, context and explanation that make the work useful later.</a:t>
-            </a:r>
-          </a:p>
-          <a:p/>
-          <a:p>
-            <a:r>
-              <a:t>Teach the card one row at a time.</a:t>
-            </a:r>
-          </a:p>
-          <a:p/>
-          <a:p>
-            <a:r>
-              <a:t>Keep the account permitted and high level. Nothing confidential and no</a:t>
-            </a:r>
-          </a:p>
-          <a:p>
-            <a:r>
-              <a:t>employer-owned material.</a:t>
+              <a:t>Reveal frame 3 of 4 — main slide 9.</a:t>
+            </a:r>
+          </a:p>
+          <a:p>
+            <a:r>
+              <a:t>Timing: approximately 5:50.</a:t>
+            </a:r>
+          </a:p>
+          <a:p>
+            <a:r>
+              <a:t>Reveal the four lines: the situation, my role, what changed, what this shows.</a:t>
+            </a:r>
+          </a:p>
+          <a:p>
+            <a:r>
+              <a:t>The permitted-record boundary is spoken: nothing confidential, nothing employer-owned. Do not edit around it.</a:t>
+            </a:r>
+          </a:p>
+          <a:p>
+            <a:r>
+              <a:t>The narrowest-capability rule is the teaching point of this slide. Temidayo models it on herself and then extends it to the viewer: "I should not turn that into a claim that I can transform every employee experience problem, and I do not want you to overreach either." </a:t>
             </a:r>
           </a:p>
         </p:txBody>
@@ -1229,35 +1153,27 @@
           <a:lstStyle/>
           <a:p>
             <a:r>
-              <a:t>Timing: 4:58-6:25</a:t>
-            </a:r>
-          </a:p>
-          <a:p/>
-          <a:p>
-            <a:r>
-              <a:t>Explain that professionals often remember project names while losing the</a:t>
-            </a:r>
-          </a:p>
-          <a:p>
-            <a:r>
-              <a:t>evidence, context and explanation that make the work useful later.</a:t>
-            </a:r>
-          </a:p>
-          <a:p/>
-          <a:p>
-            <a:r>
-              <a:t>Teach the card one row at a time.</a:t>
-            </a:r>
-          </a:p>
-          <a:p/>
-          <a:p>
-            <a:r>
-              <a:t>Keep the account permitted and high level. Nothing confidential and no</a:t>
-            </a:r>
-          </a:p>
-          <a:p>
-            <a:r>
-              <a:t>employer-owned material.</a:t>
+              <a:t>Reveal frame 4 of 4 — main slide 9.</a:t>
+            </a:r>
+          </a:p>
+          <a:p>
+            <a:r>
+              <a:t>Timing: approximately 5:50.</a:t>
+            </a:r>
+          </a:p>
+          <a:p>
+            <a:r>
+              <a:t>Reveal the four lines: the situation, my role, what changed, what this shows.</a:t>
+            </a:r>
+          </a:p>
+          <a:p>
+            <a:r>
+              <a:t>The permitted-record boundary is spoken: nothing confidential, nothing employer-owned. Do not edit around it.</a:t>
+            </a:r>
+          </a:p>
+          <a:p>
+            <a:r>
+              <a:t>The narrowest-capability rule is the teaching point of this slide. Temidayo models it on herself and then extends it to the viewer: "I should not turn that into a claim that I can transform every employee experience problem, and I do not want you to overreach either." </a:t>
             </a:r>
           </a:p>
         </p:txBody>
@@ -1327,24 +1243,27 @@
           <a:lstStyle/>
           <a:p>
             <a:r>
-              <a:t>Timing: 6:25-6:40</a:t>
-            </a:r>
-          </a:p>
-          <a:p/>
-          <a:p>
-            <a:r>
-              <a:t>The first and only moment all three appear together.</a:t>
-            </a:r>
-          </a:p>
-          <a:p/>
-          <a:p>
-            <a:r>
-              <a:t>Name them once, in order, then move to the viewer exercise. Do not teach</a:t>
-            </a:r>
-          </a:p>
-          <a:p>
-            <a:r>
-              <a:t>them again.</a:t>
+              <a:t>Single-state frame — main slide 10.</a:t>
+            </a:r>
+          </a:p>
+          <a:p>
+            <a:r>
+              <a:t>Timing: approximately 7:09.</a:t>
+            </a:r>
+          </a:p>
+          <a:p>
+            <a:r>
+              <a:t>The consolidation card. Reveal the three practices in order.</a:t>
+            </a:r>
+          </a:p>
+          <a:p>
+            <a:r>
+              <a:t>"They helped me avoid two mistakes: assuming that everything transfers, and assuming that nothing does." Both halves matter; do not cut either.</a:t>
+            </a:r>
+          </a:p>
+          <a:p>
+            <a:r>
+              <a:t>Do not add a fourth practice, an acronym or the Career Evidence 3 Cs. The three practices are the only memory device in this video.</a:t>
             </a:r>
           </a:p>
         </p:txBody>
@@ -1414,24 +1333,27 @@
           <a:lstStyle/>
           <a:p>
             <a:r>
-              <a:t>Timing: 6:40-7:45</a:t>
-            </a:r>
-          </a:p>
-          <a:p/>
-          <a:p>
-            <a:r>
-              <a:t>Ask one question at a time and pause.</a:t>
-            </a:r>
-          </a:p>
-          <a:p/>
-          <a:p>
-            <a:r>
-              <a:t>Leave five to seven seconds after the third question before moving to the</a:t>
-            </a:r>
-          </a:p>
-          <a:p>
-            <a:r>
-              <a:t>Career Evidence Starter invitation.</a:t>
+              <a:t>Reveal frame 1 of 3 — main slide 11.</a:t>
+            </a:r>
+          </a:p>
+          <a:p>
+            <a:r>
+              <a:t>Timing: approximately 7:51.</a:t>
+            </a:r>
+          </a:p>
+          <a:p>
+            <a:r>
+              <a:t>Reveal the three questions one at a time.</a:t>
+            </a:r>
+          </a:p>
+          <a:p>
+            <a:r>
+              <a:t>"Pause here if you want to write them down." Hold the frame long enough for that to be possible.</a:t>
+            </a:r>
+          </a:p>
+          <a:p>
+            <a:r>
+              <a:t>Close on the reframe: you are not trying to prove you will never need to learn anything new, you are trying to avoid starting over where you already have evidence.</a:t>
             </a:r>
           </a:p>
         </p:txBody>
@@ -1501,24 +1423,27 @@
           <a:lstStyle/>
           <a:p>
             <a:r>
-              <a:t>Timing: 6:40-7:45</a:t>
-            </a:r>
-          </a:p>
-          <a:p/>
-          <a:p>
-            <a:r>
-              <a:t>Ask one question at a time and pause.</a:t>
-            </a:r>
-          </a:p>
-          <a:p/>
-          <a:p>
-            <a:r>
-              <a:t>Leave five to seven seconds after the third question before moving to the</a:t>
-            </a:r>
-          </a:p>
-          <a:p>
-            <a:r>
-              <a:t>Career Evidence Starter invitation.</a:t>
+              <a:t>Reveal frame 2 of 3 — main slide 11.</a:t>
+            </a:r>
+          </a:p>
+          <a:p>
+            <a:r>
+              <a:t>Timing: approximately 7:51.</a:t>
+            </a:r>
+          </a:p>
+          <a:p>
+            <a:r>
+              <a:t>Reveal the three questions one at a time.</a:t>
+            </a:r>
+          </a:p>
+          <a:p>
+            <a:r>
+              <a:t>"Pause here if you want to write them down." Hold the frame long enough for that to be possible.</a:t>
+            </a:r>
+          </a:p>
+          <a:p>
+            <a:r>
+              <a:t>Close on the reframe: you are not trying to prove you will never need to learn anything new, you are trying to avoid starting over where you already have evidence.</a:t>
             </a:r>
           </a:p>
         </p:txBody>
@@ -1588,36 +1513,27 @@
           <a:lstStyle/>
           <a:p>
             <a:r>
-              <a:t>Timing: 0:35-1:35</a:t>
-            </a:r>
-          </a:p>
-          <a:p/>
-          <a:p>
-            <a:r>
-              <a:t>Speak naturally from the career sequence. Do not read the slide.</a:t>
-            </a:r>
-          </a:p>
-          <a:p/>
-          <a:p>
-            <a:r>
-              <a:t>Use this transition:</a:t>
-            </a:r>
-          </a:p>
-          <a:p/>
-          <a:p>
-            <a:r>
-              <a:t>"The continuity was not always visible in the job titles. I had to look</a:t>
-            </a:r>
-          </a:p>
-          <a:p>
-            <a:r>
-              <a:t>underneath them and ask what the work had actually trained me to do."</a:t>
-            </a:r>
-          </a:p>
-          <a:p/>
-          <a:p>
-            <a:r>
-              <a:t>Keep the camera in the upper-left safe area while the timeline is up.</a:t>
+              <a:t>Single-state frame — main slide 2.</a:t>
+            </a:r>
+          </a:p>
+          <a:p>
+            <a:r>
+              <a:t>Timing: approximately 1:09.</a:t>
+            </a:r>
+          </a:p>
+          <a:p>
+            <a:r>
+              <a:t>The chronology lives on the slide. Temidayo deliberately does not walk through every title: "The slide shows the broad chapters of my career, so I am not going to walk you through every title."</a:t>
+            </a:r>
+          </a:p>
+          <a:p>
+            <a:r>
+              <a:t>The December 2008 accounting degree and the financial crisis stay exactly as spoken. No employer named, no further detail.</a:t>
+            </a:r>
+          </a:p>
+          <a:p>
+            <a:r>
+              <a:t>The turn is "I did not carry every task forward. I carried forms of judgment." Let it sit, then the viewer hand-off: "That is the question I want to help you answer, and three practices got me there." </a:t>
             </a:r>
           </a:p>
         </p:txBody>
@@ -1687,24 +1603,27 @@
           <a:lstStyle/>
           <a:p>
             <a:r>
-              <a:t>Timing: 6:40-7:45</a:t>
-            </a:r>
-          </a:p>
-          <a:p/>
-          <a:p>
-            <a:r>
-              <a:t>Ask one question at a time and pause.</a:t>
-            </a:r>
-          </a:p>
-          <a:p/>
-          <a:p>
-            <a:r>
-              <a:t>Leave five to seven seconds after the third question before moving to the</a:t>
-            </a:r>
-          </a:p>
-          <a:p>
-            <a:r>
-              <a:t>Career Evidence Starter invitation.</a:t>
+              <a:t>Reveal frame 3 of 3 — main slide 11.</a:t>
+            </a:r>
+          </a:p>
+          <a:p>
+            <a:r>
+              <a:t>Timing: approximately 7:51.</a:t>
+            </a:r>
+          </a:p>
+          <a:p>
+            <a:r>
+              <a:t>Reveal the three questions one at a time.</a:t>
+            </a:r>
+          </a:p>
+          <a:p>
+            <a:r>
+              <a:t>"Pause here if you want to write them down." Hold the frame long enough for that to be possible.</a:t>
+            </a:r>
+          </a:p>
+          <a:p>
+            <a:r>
+              <a:t>Close on the reframe: you are not trying to prove you will never need to learn anything new, you are trying to avoid starting over where you already have evidence.</a:t>
             </a:r>
           </a:p>
         </p:txBody>
@@ -1774,42 +1693,32 @@
           <a:lstStyle/>
           <a:p>
             <a:r>
-              <a:t>Timing: 7:45-8:20</a:t>
-            </a:r>
-          </a:p>
-          <a:p/>
-          <a:p>
-            <a:r>
-              <a:t>Exact invitation:</a:t>
-            </a:r>
-          </a:p>
-          <a:p/>
-          <a:p>
-            <a:r>
-              <a:t>"If you want to try this on one real accomplishment, I made a free Career Evidence Starter.</a:t>
-            </a:r>
-          </a:p>
-          <a:p/>
-          <a:p>
-            <a:r>
-              <a:t>It takes about 10 to 15 focused minutes and helps you turn one piece of work into a portable Proof Line.</a:t>
-            </a:r>
-          </a:p>
-          <a:p/>
-          <a:p>
-            <a:r>
-              <a:t>I’ve linked it below."</a:t>
-            </a:r>
-          </a:p>
-          <a:p/>
-          <a:p>
-            <a:r>
-              <a:t>Keep the delivery calm and brief. This is the only resource invitation in</a:t>
-            </a:r>
-          </a:p>
-          <a:p>
-            <a:r>
-              <a:t>the video.</a:t>
+              <a:t>Single-state frame — main slide 12.</a:t>
+            </a:r>
+          </a:p>
+          <a:p>
+            <a:r>
+              <a:t>Timing: approximately 8:43.</a:t>
+            </a:r>
+          </a:p>
+          <a:p>
+            <a:r>
+              <a:t>Calm and brief. This is the only resource invitation in the video, and it is the FREE Career Evidence Starter.</a:t>
+            </a:r>
+          </a:p>
+          <a:p>
+            <a:r>
+              <a:t>Exact invitation, verbatim from the v4.0 script:</a:t>
+            </a:r>
+          </a:p>
+          <a:p>
+            <a:r>
+              <a:t>"If you want to try this on one real accomplishment of yours, I made a free Career Evidence Starter. It takes about 10 to 15 focused minutes and helps you turn one piece of work into a portable Proof Line. I've linked it below."</a:t>
+            </a:r>
+          </a:p>
+          <a:p>
+            <a:r>
+              <a:t>The supporting artwork on this slide is the REAL Career Evidence Starter artifact: the cover in front, the Portable Proof Line page behind. No Field Kit imagery remains anywhere in either deck; do not restore it. Use the direct public landing-page URL only — no PDF link.</a:t>
             </a:r>
           </a:p>
         </p:txBody>
@@ -1879,46 +1788,32 @@
           <a:lstStyle/>
           <a:p>
             <a:r>
-              <a:t>Timing: 8:20-9:00</a:t>
-            </a:r>
-          </a:p>
-          <a:p/>
-          <a:p>
-            <a:r>
-              <a:t>Exact bridge:</a:t>
-            </a:r>
-          </a:p>
-          <a:p/>
-          <a:p>
-            <a:r>
-              <a:t>"In the next video, I will show you how to recognize when you are still</a:t>
-            </a:r>
-          </a:p>
-          <a:p>
-            <a:r>
-              <a:t>performing well but the work is no longer expanding your skills or future</a:t>
-            </a:r>
-          </a:p>
-          <a:p>
-            <a:r>
-              <a:t>options."</a:t>
-            </a:r>
-          </a:p>
-          <a:p/>
-          <a:p>
-            <a:r>
-              <a:t>Do not summarize the current video again.</a:t>
-            </a:r>
-          </a:p>
-          <a:p/>
-          <a:p>
-            <a:r>
-              <a:t>The right side of this frame is left open for the YouTube linked-video</a:t>
-            </a:r>
-          </a:p>
-          <a:p>
-            <a:r>
-              <a:t>end-screen element. Hold the final frame for at least 12 seconds.</a:t>
+              <a:t>Single-state frame — main slide 13.</a:t>
+            </a:r>
+          </a:p>
+          <a:p>
+            <a:r>
+              <a:t>Timing: approximately 9:01 to the end, about 9:43.</a:t>
+            </a:r>
+          </a:p>
+          <a:p>
+            <a:r>
+              <a:t>The card reads "Is Your Job Making You Less Marketable?", which is the locked Video 2 title and matches what Temidayo says.</a:t>
+            </a:r>
+          </a:p>
+          <a:p>
+            <a:r>
+              <a:t>Closing lines: "You do not have to erase your career to change jobs. But you do need to know what you are carrying." Stay on her for both.</a:t>
+            </a:r>
+          </a:p>
+          <a:p>
+            <a:r>
+              <a:t>Do not summarize this video again.</a:t>
+            </a:r>
+          </a:p>
+          <a:p>
+            <a:r>
+              <a:t>The right side of the frame is left open for the YouTube linked-video end-screen element. Hold the final frame for at least 12 seconds. Do not leave Subscribe as the only end-screen element.</a:t>
             </a:r>
           </a:p>
         </p:txBody>
@@ -1988,30 +1883,17 @@
           <a:lstStyle/>
           <a:p>
             <a:r>
-              <a:t>Timing: 1:35-1:43</a:t>
-            </a:r>
-          </a:p>
-          <a:p/>
-          <a:p>
-            <a:r>
-              <a:t>A section break, four to seven seconds, while you name the first idea.</a:t>
-            </a:r>
-          </a:p>
-          <a:p/>
-          <a:p>
-            <a:r>
-              <a:t>Do not teach it here. The Move One slide follows.</a:t>
-            </a:r>
-          </a:p>
-          <a:p/>
-          <a:p>
-            <a:r>
-              <a:t>Only this idea is on screen. The second and third come later, each in its</a:t>
-            </a:r>
-          </a:p>
-          <a:p>
-            <a:r>
-              <a:t>own moment.</a:t>
+              <a:t>Single-state frame — main slide 3.</a:t>
+            </a:r>
+          </a:p>
+          <a:p>
+            <a:r>
+              <a:t>Timing: approximately 2:15, holding to about 2:19.</a:t>
+            </a:r>
+          </a:p>
+          <a:p>
+            <a:r>
+              <a:t>Section card. Hold briefly, then return to presenter.</a:t>
             </a:r>
           </a:p>
         </p:txBody>
@@ -2081,41 +1963,32 @@
           <a:lstStyle/>
           <a:p>
             <a:r>
-              <a:t>Timing: 1:43-3:05</a:t>
-            </a:r>
-          </a:p>
-          <a:p/>
-          <a:p>
-            <a:r>
-              <a:t>Explain that the title identifies where the work sat, while the questions</a:t>
-            </a:r>
-          </a:p>
-          <a:p>
-            <a:r>
-              <a:t>reveal what the experience developed.</a:t>
-            </a:r>
-          </a:p>
-          <a:p/>
-          <a:p>
-            <a:r>
-              <a:t>Reveal one question at a time.</a:t>
-            </a:r>
-          </a:p>
-          <a:p/>
-          <a:p>
-            <a:r>
-              <a:t>Viewer action:</a:t>
-            </a:r>
-          </a:p>
-          <a:p/>
-          <a:p>
-            <a:r>
-              <a:t>Write down your current title. Under it, name three problems people now</a:t>
-            </a:r>
-          </a:p>
-          <a:p>
-            <a:r>
-              <a:t>trust you to solve.</a:t>
+              <a:t>Reveal frame 1 of 3 — main slide 4.</a:t>
+            </a:r>
+          </a:p>
+          <a:p>
+            <a:r>
+              <a:t>Timing: approximately 2:19.</a:t>
+            </a:r>
+          </a:p>
+          <a:p>
+            <a:r>
+              <a:t>Reveal the three questions as they are asked.</a:t>
+            </a:r>
+          </a:p>
+          <a:p>
+            <a:r>
+              <a:t>Note the v4.0 framing: "The questions on screen are the ones I use, and I want you to use them too." Keep her on camera for it.</a:t>
+            </a:r>
+          </a:p>
+          <a:p>
+            <a:r>
+              <a:t>Her own nouns — accounting, cybersecurity, people strategy — are named once and then set against the recurring forms of judgment. Do not turn that into a claim that they are one profession.</a:t>
+            </a:r>
+          </a:p>
+          <a:p>
+            <a:r>
+              <a:t>Close on the portability boundary: capability can travel while context still has to be learned. "That is not starting from zero. That is carrying something proven into a real learning curve." Do not cut it.</a:t>
             </a:r>
           </a:p>
         </p:txBody>
@@ -2185,41 +2058,32 @@
           <a:lstStyle/>
           <a:p>
             <a:r>
-              <a:t>Timing: 1:43-3:05</a:t>
-            </a:r>
-          </a:p>
-          <a:p/>
-          <a:p>
-            <a:r>
-              <a:t>Explain that the title identifies where the work sat, while the questions</a:t>
-            </a:r>
-          </a:p>
-          <a:p>
-            <a:r>
-              <a:t>reveal what the experience developed.</a:t>
-            </a:r>
-          </a:p>
-          <a:p/>
-          <a:p>
-            <a:r>
-              <a:t>Reveal one question at a time.</a:t>
-            </a:r>
-          </a:p>
-          <a:p/>
-          <a:p>
-            <a:r>
-              <a:t>Viewer action:</a:t>
-            </a:r>
-          </a:p>
-          <a:p/>
-          <a:p>
-            <a:r>
-              <a:t>Write down your current title. Under it, name three problems people now</a:t>
-            </a:r>
-          </a:p>
-          <a:p>
-            <a:r>
-              <a:t>trust you to solve.</a:t>
+              <a:t>Reveal frame 2 of 3 — main slide 4.</a:t>
+            </a:r>
+          </a:p>
+          <a:p>
+            <a:r>
+              <a:t>Timing: approximately 2:19.</a:t>
+            </a:r>
+          </a:p>
+          <a:p>
+            <a:r>
+              <a:t>Reveal the three questions as they are asked.</a:t>
+            </a:r>
+          </a:p>
+          <a:p>
+            <a:r>
+              <a:t>Note the v4.0 framing: "The questions on screen are the ones I use, and I want you to use them too." Keep her on camera for it.</a:t>
+            </a:r>
+          </a:p>
+          <a:p>
+            <a:r>
+              <a:t>Her own nouns — accounting, cybersecurity, people strategy — are named once and then set against the recurring forms of judgment. Do not turn that into a claim that they are one profession.</a:t>
+            </a:r>
+          </a:p>
+          <a:p>
+            <a:r>
+              <a:t>Close on the portability boundary: capability can travel while context still has to be learned. "That is not starting from zero. That is carrying something proven into a real learning curve." Do not cut it.</a:t>
             </a:r>
           </a:p>
         </p:txBody>
@@ -2289,41 +2153,32 @@
           <a:lstStyle/>
           <a:p>
             <a:r>
-              <a:t>Timing: 1:43-3:05</a:t>
-            </a:r>
-          </a:p>
-          <a:p/>
-          <a:p>
-            <a:r>
-              <a:t>Explain that the title identifies where the work sat, while the questions</a:t>
-            </a:r>
-          </a:p>
-          <a:p>
-            <a:r>
-              <a:t>reveal what the experience developed.</a:t>
-            </a:r>
-          </a:p>
-          <a:p/>
-          <a:p>
-            <a:r>
-              <a:t>Reveal one question at a time.</a:t>
-            </a:r>
-          </a:p>
-          <a:p/>
-          <a:p>
-            <a:r>
-              <a:t>Viewer action:</a:t>
-            </a:r>
-          </a:p>
-          <a:p/>
-          <a:p>
-            <a:r>
-              <a:t>Write down your current title. Under it, name three problems people now</a:t>
-            </a:r>
-          </a:p>
-          <a:p>
-            <a:r>
-              <a:t>trust you to solve.</a:t>
+              <a:t>Reveal frame 3 of 3 — main slide 4.</a:t>
+            </a:r>
+          </a:p>
+          <a:p>
+            <a:r>
+              <a:t>Timing: approximately 2:19.</a:t>
+            </a:r>
+          </a:p>
+          <a:p>
+            <a:r>
+              <a:t>Reveal the three questions as they are asked.</a:t>
+            </a:r>
+          </a:p>
+          <a:p>
+            <a:r>
+              <a:t>Note the v4.0 framing: "The questions on screen are the ones I use, and I want you to use them too." Keep her on camera for it.</a:t>
+            </a:r>
+          </a:p>
+          <a:p>
+            <a:r>
+              <a:t>Her own nouns — accounting, cybersecurity, people strategy — are named once and then set against the recurring forms of judgment. Do not turn that into a claim that they are one profession.</a:t>
+            </a:r>
+          </a:p>
+          <a:p>
+            <a:r>
+              <a:t>Close on the portability boundary: capability can travel while context still has to be learned. "That is not starting from zero. That is carrying something proven into a real learning curve." Do not cut it.</a:t>
             </a:r>
           </a:p>
         </p:txBody>
@@ -2393,19 +2248,17 @@
           <a:lstStyle/>
           <a:p>
             <a:r>
-              <a:t>Timing: 3:05-3:13</a:t>
-            </a:r>
-          </a:p>
-          <a:p/>
-          <a:p>
-            <a:r>
-              <a:t>A section break, four to seven seconds, while you name the second idea.</a:t>
-            </a:r>
-          </a:p>
-          <a:p/>
-          <a:p>
-            <a:r>
-              <a:t>Do not restate the first idea. Move Two follows.</a:t>
+              <a:t>Single-state frame — main slide 5.</a:t>
+            </a:r>
+          </a:p>
+          <a:p>
+            <a:r>
+              <a:t>Timing: approximately 4:03, holding to about 4:07.</a:t>
+            </a:r>
+          </a:p>
+          <a:p>
+            <a:r>
+              <a:t>Section card. Hold briefly, then return to presenter.</a:t>
             </a:r>
           </a:p>
         </p:txBody>
@@ -2475,35 +2328,27 @@
           <a:lstStyle/>
           <a:p>
             <a:r>
-              <a:t>Timing: 3:13-4:05</a:t>
-            </a:r>
-          </a:p>
-          <a:p/>
-          <a:p>
-            <a:r>
-              <a:t>Explain that "onboarding redesign" names the project but does not yet tell</a:t>
-            </a:r>
-          </a:p>
-          <a:p>
-            <a:r>
-              <a:t>an unfamiliar viewer what improved.</a:t>
-            </a:r>
-          </a:p>
-          <a:p/>
-          <a:p>
-            <a:r>
-              <a:t>State clearly that you led the redesign with your team.</a:t>
-            </a:r>
-          </a:p>
-          <a:p/>
-          <a:p>
-            <a:r>
-              <a:t>Reveal the portable description only after the internal one has been read</a:t>
-            </a:r>
-          </a:p>
-          <a:p>
-            <a:r>
-              <a:t>aloud and explained.</a:t>
+              <a:t>Reveal frame 1 of 2 — main slide 6.</a:t>
+            </a:r>
+          </a:p>
+          <a:p>
+            <a:r>
+              <a:t>Timing: approximately 4:07.</a:t>
+            </a:r>
+          </a:p>
+          <a:p>
+            <a:r>
+              <a:t>Show the internal description first, then the clearer version.</a:t>
+            </a:r>
+          </a:p>
+          <a:p>
+            <a:r>
+              <a:t>"Let me show you the more useful version" is the coaching turn. Stay on Temidayo.</a:t>
+            </a:r>
+          </a:p>
+          <a:p>
+            <a:r>
+              <a:t>The point is explicitly NOT that a number is better: "That sentence is not better simply because it includes a number." Keep that qualifier.</a:t>
             </a:r>
           </a:p>
         </p:txBody>
@@ -2573,35 +2418,27 @@
           <a:lstStyle/>
           <a:p>
             <a:r>
-              <a:t>Timing: 3:13-4:05</a:t>
-            </a:r>
-          </a:p>
-          <a:p/>
-          <a:p>
-            <a:r>
-              <a:t>Explain that "onboarding redesign" names the project but does not yet tell</a:t>
-            </a:r>
-          </a:p>
-          <a:p>
-            <a:r>
-              <a:t>an unfamiliar viewer what improved.</a:t>
-            </a:r>
-          </a:p>
-          <a:p/>
-          <a:p>
-            <a:r>
-              <a:t>State clearly that you led the redesign with your team.</a:t>
-            </a:r>
-          </a:p>
-          <a:p/>
-          <a:p>
-            <a:r>
-              <a:t>Reveal the portable description only after the internal one has been read</a:t>
-            </a:r>
-          </a:p>
-          <a:p>
-            <a:r>
-              <a:t>aloud and explained.</a:t>
+              <a:t>Reveal frame 2 of 2 — main slide 6.</a:t>
+            </a:r>
+          </a:p>
+          <a:p>
+            <a:r>
+              <a:t>Timing: approximately 4:07.</a:t>
+            </a:r>
+          </a:p>
+          <a:p>
+            <a:r>
+              <a:t>Show the internal description first, then the clearer version.</a:t>
+            </a:r>
+          </a:p>
+          <a:p>
+            <a:r>
+              <a:t>"Let me show you the more useful version" is the coaching turn. Stay on Temidayo.</a:t>
+            </a:r>
+          </a:p>
+          <a:p>
+            <a:r>
+              <a:t>The point is explicitly NOT that a number is better: "That sentence is not better simply because it includes a number." Keep that qualifier.</a:t>
             </a:r>
           </a:p>
         </p:txBody>

--- a/deliverables/video-1-slides/out/Video-1-Reveal-Builds_v2.4.pptx
+++ b/deliverables/video-1-slides/out/Video-1-Reveal-Builds_v2.4.pptx
@@ -528,17 +528,27 @@
           </a:p>
           <a:p>
             <a:r>
-              <a:t>Timing: approximately 0:33 to 1:09.</a:t>
-            </a:r>
-          </a:p>
-          <a:p>
-            <a:r>
-              <a:t>Do NOT open on this slide. Begin full-screen on Temidayo and let the whole opening land: the hook, the correction, her roughly eighteen years across very different functions and industries, and the three-practice promise.</a:t>
-            </a:r>
-          </a:p>
-          <a:p>
-            <a:r>
-              <a:t>Bring the title up under the channel line, then the promise boundary: "And I want to be clear with you about the promise. Not everything transfers."</a:t>
+              <a:t>Timing: approximately 0:39 to 1:31.</a:t>
+            </a:r>
+          </a:p>
+          <a:p>
+            <a:r>
+              <a:t>Do NOT open on this slide. Begin full-screen on Temidayo and let the whole opening land first: the viewer's situation, the question underneath it, "I know that question, I have had to answer it more than once", the honest answer, and the three-practice promise.</a:t>
+            </a:r>
+          </a:p>
+          <a:p>
+            <a:r>
+              <a:t>Recognition comes before anything is taught. Nothing may cut into that.</a:t>
+            </a:r>
+          </a:p>
+          <a:p>
+            <a:r>
+              <a:t>Bring the title up under the channel line, then hold for the promise boundary: "I cannot tell you that everything transfers, because it does not."</a:t>
+            </a:r>
+          </a:p>
+          <a:p>
+            <a:r>
+              <a:t>That refusal is what makes the rest of the video believable. Do not soften it.</a:t>
             </a:r>
           </a:p>
           <a:p>
@@ -618,7 +628,7 @@
           </a:p>
           <a:p>
             <a:r>
-              <a:t>Timing: approximately 5:06.</a:t>
+              <a:t>Timing: approximately 6:09.</a:t>
             </a:r>
           </a:p>
           <a:p>
@@ -628,17 +638,17 @@
           </a:p>
           <a:p>
             <a:r>
-              <a:t>FACTUAL BOUNDARY, spoken out loud and not to be trimmed: it was ONE measure of how well new hires felt integrated, not a claim about everything the redesign affected, and it was team-based work that Temidayo LED, not something she did alone.</a:t>
-            </a:r>
-          </a:p>
-          <a:p>
-            <a:r>
-              <a:t>Do not add the ~30% retention improvement or the &gt;$2M avoided-turnover figure. Neither is in this video and neither may appear in a graphic, caption or thumbnail.</a:t>
-            </a:r>
-          </a:p>
-          <a:p>
-            <a:r>
-              <a:t>Close on: portable evidence connects the situation, the contribution and what changed.</a:t>
+              <a:t>FACTUAL BOUNDARY, spoken aloud and not to be trimmed: ONE measure of how well new hires felt integrated, not a claim about everything the redesign touched; and team work that Temidayo LED, not solo work.</a:t>
+            </a:r>
+          </a:p>
+          <a:p>
+            <a:r>
+              <a:t>The v5.0 line to protect is "People trust the person who tells them the edges of their own claim." That is the reason this slide exists.</a:t>
+            </a:r>
+          </a:p>
+          <a:p>
+            <a:r>
+              <a:t>Do not add the ~30% retention improvement or the &gt;$2M avoided-turnover figure. Neither is in this video and neither may appear in any graphic or caption.</a:t>
             </a:r>
           </a:p>
         </p:txBody>
@@ -713,7 +723,7 @@
           </a:p>
           <a:p>
             <a:r>
-              <a:t>Timing: approximately 5:06.</a:t>
+              <a:t>Timing: approximately 6:09.</a:t>
             </a:r>
           </a:p>
           <a:p>
@@ -723,17 +733,17 @@
           </a:p>
           <a:p>
             <a:r>
-              <a:t>FACTUAL BOUNDARY, spoken out loud and not to be trimmed: it was ONE measure of how well new hires felt integrated, not a claim about everything the redesign affected, and it was team-based work that Temidayo LED, not something she did alone.</a:t>
-            </a:r>
-          </a:p>
-          <a:p>
-            <a:r>
-              <a:t>Do not add the ~30% retention improvement or the &gt;$2M avoided-turnover figure. Neither is in this video and neither may appear in a graphic, caption or thumbnail.</a:t>
-            </a:r>
-          </a:p>
-          <a:p>
-            <a:r>
-              <a:t>Close on: portable evidence connects the situation, the contribution and what changed.</a:t>
+              <a:t>FACTUAL BOUNDARY, spoken aloud and not to be trimmed: ONE measure of how well new hires felt integrated, not a claim about everything the redesign touched; and team work that Temidayo LED, not solo work.</a:t>
+            </a:r>
+          </a:p>
+          <a:p>
+            <a:r>
+              <a:t>The v5.0 line to protect is "People trust the person who tells them the edges of their own claim." That is the reason this slide exists.</a:t>
+            </a:r>
+          </a:p>
+          <a:p>
+            <a:r>
+              <a:t>Do not add the ~30% retention improvement or the &gt;$2M avoided-turnover figure. Neither is in this video and neither may appear in any graphic or caption.</a:t>
             </a:r>
           </a:p>
         </p:txBody>
@@ -808,12 +818,12 @@
           </a:p>
           <a:p>
             <a:r>
-              <a:t>Timing: approximately 5:45, holding to about 5:50.</a:t>
-            </a:r>
-          </a:p>
-          <a:p>
-            <a:r>
-              <a:t>Section card. Hold briefly, then return to presenter.</a:t>
+              <a:t>Timing: approximately 6:52, holding to about 6:57.</a:t>
+            </a:r>
+          </a:p>
+          <a:p>
+            <a:r>
+              <a:t>Section card. Hold briefly, then back to presenter.</a:t>
             </a:r>
           </a:p>
         </p:txBody>
@@ -888,7 +898,7 @@
           </a:p>
           <a:p>
             <a:r>
-              <a:t>Timing: approximately 5:50.</a:t>
+              <a:t>Timing: approximately 6:57.</a:t>
             </a:r>
           </a:p>
           <a:p>
@@ -898,12 +908,12 @@
           </a:p>
           <a:p>
             <a:r>
-              <a:t>The permitted-record boundary is spoken: nothing confidential, nothing employer-owned. Do not edit around it.</a:t>
-            </a:r>
-          </a:p>
-          <a:p>
-            <a:r>
-              <a:t>The narrowest-capability rule is the teaching point of this slide. Temidayo models it on herself and then extends it to the viewer: "I should not turn that into a claim that I can transform every employee experience problem, and I do not want you to overreach either." </a:t>
+              <a:t>The permitted-record boundary is spoken — in your own words, nothing confidential, nothing employer-owned. Do not edit around it.</a:t>
+            </a:r>
+          </a:p>
+          <a:p>
+            <a:r>
+              <a:t>The "what this shows" line is the honesty test: the smallest claim the evidence can hold. Temidayo models it on herself first, then extends it to the viewer: "I do not want you to stretch yours either." </a:t>
             </a:r>
           </a:p>
         </p:txBody>
@@ -978,7 +988,7 @@
           </a:p>
           <a:p>
             <a:r>
-              <a:t>Timing: approximately 5:50.</a:t>
+              <a:t>Timing: approximately 6:57.</a:t>
             </a:r>
           </a:p>
           <a:p>
@@ -988,12 +998,12 @@
           </a:p>
           <a:p>
             <a:r>
-              <a:t>The permitted-record boundary is spoken: nothing confidential, nothing employer-owned. Do not edit around it.</a:t>
-            </a:r>
-          </a:p>
-          <a:p>
-            <a:r>
-              <a:t>The narrowest-capability rule is the teaching point of this slide. Temidayo models it on herself and then extends it to the viewer: "I should not turn that into a claim that I can transform every employee experience problem, and I do not want you to overreach either." </a:t>
+              <a:t>The permitted-record boundary is spoken — in your own words, nothing confidential, nothing employer-owned. Do not edit around it.</a:t>
+            </a:r>
+          </a:p>
+          <a:p>
+            <a:r>
+              <a:t>The "what this shows" line is the honesty test: the smallest claim the evidence can hold. Temidayo models it on herself first, then extends it to the viewer: "I do not want you to stretch yours either." </a:t>
             </a:r>
           </a:p>
         </p:txBody>
@@ -1068,7 +1078,7 @@
           </a:p>
           <a:p>
             <a:r>
-              <a:t>Timing: approximately 5:50.</a:t>
+              <a:t>Timing: approximately 6:57.</a:t>
             </a:r>
           </a:p>
           <a:p>
@@ -1078,12 +1088,12 @@
           </a:p>
           <a:p>
             <a:r>
-              <a:t>The permitted-record boundary is spoken: nothing confidential, nothing employer-owned. Do not edit around it.</a:t>
-            </a:r>
-          </a:p>
-          <a:p>
-            <a:r>
-              <a:t>The narrowest-capability rule is the teaching point of this slide. Temidayo models it on herself and then extends it to the viewer: "I should not turn that into a claim that I can transform every employee experience problem, and I do not want you to overreach either." </a:t>
+              <a:t>The permitted-record boundary is spoken — in your own words, nothing confidential, nothing employer-owned. Do not edit around it.</a:t>
+            </a:r>
+          </a:p>
+          <a:p>
+            <a:r>
+              <a:t>The "what this shows" line is the honesty test: the smallest claim the evidence can hold. Temidayo models it on herself first, then extends it to the viewer: "I do not want you to stretch yours either." </a:t>
             </a:r>
           </a:p>
         </p:txBody>
@@ -1158,7 +1168,7 @@
           </a:p>
           <a:p>
             <a:r>
-              <a:t>Timing: approximately 5:50.</a:t>
+              <a:t>Timing: approximately 6:57.</a:t>
             </a:r>
           </a:p>
           <a:p>
@@ -1168,12 +1178,12 @@
           </a:p>
           <a:p>
             <a:r>
-              <a:t>The permitted-record boundary is spoken: nothing confidential, nothing employer-owned. Do not edit around it.</a:t>
-            </a:r>
-          </a:p>
-          <a:p>
-            <a:r>
-              <a:t>The narrowest-capability rule is the teaching point of this slide. Temidayo models it on herself and then extends it to the viewer: "I should not turn that into a claim that I can transform every employee experience problem, and I do not want you to overreach either." </a:t>
+              <a:t>The permitted-record boundary is spoken — in your own words, nothing confidential, nothing employer-owned. Do not edit around it.</a:t>
+            </a:r>
+          </a:p>
+          <a:p>
+            <a:r>
+              <a:t>The "what this shows" line is the honesty test: the smallest claim the evidence can hold. Temidayo models it on herself first, then extends it to the viewer: "I do not want you to stretch yours either." </a:t>
             </a:r>
           </a:p>
         </p:txBody>
@@ -1248,22 +1258,32 @@
           </a:p>
           <a:p>
             <a:r>
-              <a:t>Timing: approximately 7:09.</a:t>
-            </a:r>
-          </a:p>
-          <a:p>
-            <a:r>
-              <a:t>The consolidation card. Reveal the three practices in order.</a:t>
-            </a:r>
-          </a:p>
-          <a:p>
-            <a:r>
-              <a:t>"They helped me avoid two mistakes: assuming that everything transfers, and assuming that nothing does." Both halves matter; do not cut either.</a:t>
-            </a:r>
-          </a:p>
-          <a:p>
-            <a:r>
-              <a:t>Do not add a fourth practice, an acronym or the Career Evidence 3 Cs. The three practices are the only memory device in this video.</a:t>
+              <a:t>Timing: approximately 8:26.</a:t>
+            </a:r>
+          </a:p>
+          <a:p>
+            <a:r>
+              <a:t>The consolidation card, and then the most important stretch in the video.</a:t>
+            </a:r>
+          </a:p>
+          <a:p>
+            <a:r>
+              <a:t>Reveal the three practices in order. Then two mistakes: assuming everything transfers, and assuming nothing does. Both halves matter.</a:t>
+            </a:r>
+          </a:p>
+          <a:p>
+            <a:r>
+              <a:t>Then the honest limits — this will not stop a restructure, will not decide a hiring market, will not remove caregiving, money, health, timing or geography from the decision. Do not cut them to save time; they are why the promise is credible.</a:t>
+            </a:r>
+          </a:p>
+          <a:p>
+            <a:r>
+              <a:t>IDENTITY EXIT, at about 9:22: "I am not only trying to help you get through one job change. I want you to get to the point where a new context does not make you forget what you already know how to do."</a:t>
+            </a:r>
+          </a:p>
+          <a:p>
+            <a:r>
+              <a:t>That is the point of the video. If the edit runs long, cut something else.</a:t>
             </a:r>
           </a:p>
         </p:txBody>
@@ -1338,7 +1358,7 @@
           </a:p>
           <a:p>
             <a:r>
-              <a:t>Timing: approximately 7:51.</a:t>
+              <a:t>Timing: approximately 9:50.</a:t>
             </a:r>
           </a:p>
           <a:p>
@@ -1348,12 +1368,12 @@
           </a:p>
           <a:p>
             <a:r>
-              <a:t>"Pause here if you want to write them down." Hold the frame long enough for that to be possible.</a:t>
-            </a:r>
-          </a:p>
-          <a:p>
-            <a:r>
-              <a:t>Close on the reframe: you are not trying to prove you will never need to learn anything new, you are trying to avoid starting over where you already have evidence.</a:t>
+              <a:t>"Pause here if you want to write them down." Hold long enough for that to be possible.</a:t>
+            </a:r>
+          </a:p>
+          <a:p>
+            <a:r>
+              <a:t>Close on the reframe: not proving you will never have to learn anything new, but not starting over where you already have proof.</a:t>
             </a:r>
           </a:p>
         </p:txBody>
@@ -1428,7 +1448,7 @@
           </a:p>
           <a:p>
             <a:r>
-              <a:t>Timing: approximately 7:51.</a:t>
+              <a:t>Timing: approximately 9:50.</a:t>
             </a:r>
           </a:p>
           <a:p>
@@ -1438,12 +1458,12 @@
           </a:p>
           <a:p>
             <a:r>
-              <a:t>"Pause here if you want to write them down." Hold the frame long enough for that to be possible.</a:t>
-            </a:r>
-          </a:p>
-          <a:p>
-            <a:r>
-              <a:t>Close on the reframe: you are not trying to prove you will never need to learn anything new, you are trying to avoid starting over where you already have evidence.</a:t>
+              <a:t>"Pause here if you want to write them down." Hold long enough for that to be possible.</a:t>
+            </a:r>
+          </a:p>
+          <a:p>
+            <a:r>
+              <a:t>Close on the reframe: not proving you will never have to learn anything new, but not starting over where you already have proof.</a:t>
             </a:r>
           </a:p>
         </p:txBody>
@@ -1518,22 +1538,32 @@
           </a:p>
           <a:p>
             <a:r>
-              <a:t>Timing: approximately 1:09.</a:t>
-            </a:r>
-          </a:p>
-          <a:p>
-            <a:r>
-              <a:t>The chronology lives on the slide. Temidayo deliberately does not walk through every title: "The slide shows the broad chapters of my career, so I am not going to walk you through every title."</a:t>
-            </a:r>
-          </a:p>
-          <a:p>
-            <a:r>
-              <a:t>The December 2008 accounting degree and the financial crisis stay exactly as spoken. No employer named, no further detail.</a:t>
-            </a:r>
-          </a:p>
-          <a:p>
-            <a:r>
-              <a:t>The turn is "I did not carry every task forward. I carried forms of judgment." Let it sit, then the viewer hand-off: "That is the question I want to help you answer, and three practices got me there." </a:t>
+              <a:t>Timing: approximately 1:31.</a:t>
+            </a:r>
+          </a:p>
+          <a:p>
+            <a:r>
+              <a:t>The chronology lives on the slide. Temidayo does not read it back.</a:t>
+            </a:r>
+          </a:p>
+          <a:p>
+            <a:r>
+              <a:t>This is the belonging and lived-proof section. She names the December 2008 accounting degree and the financial crisis exactly as spoken, the real relearning in every move, going back to school, and preparing for a professional certification she did not pass on the first attempt.</a:t>
+            </a:r>
+          </a:p>
+          <a:p>
+            <a:r>
+              <a:t>That non-pass is not a throwaway. It is what earns the "not everything transfers" boundary, and it is why "I am not being modest, I have paid for that lesson" works. Do not cut either.</a:t>
+            </a:r>
+          </a:p>
+          <a:p>
+            <a:r>
+              <a:t>Then the turn: she did not carry the tasks forward, she carried the kind of work people kept trusting her with. And the question she asks herself changes.</a:t>
+            </a:r>
+          </a:p>
+          <a:p>
+            <a:r>
+              <a:t>Temidayo is evidence here, not the hero. If a cut makes her the subject rather than the proof, it is the wrong cut.</a:t>
             </a:r>
           </a:p>
         </p:txBody>
@@ -1608,7 +1638,7 @@
           </a:p>
           <a:p>
             <a:r>
-              <a:t>Timing: approximately 7:51.</a:t>
+              <a:t>Timing: approximately 9:50.</a:t>
             </a:r>
           </a:p>
           <a:p>
@@ -1618,12 +1648,12 @@
           </a:p>
           <a:p>
             <a:r>
-              <a:t>"Pause here if you want to write them down." Hold the frame long enough for that to be possible.</a:t>
-            </a:r>
-          </a:p>
-          <a:p>
-            <a:r>
-              <a:t>Close on the reframe: you are not trying to prove you will never need to learn anything new, you are trying to avoid starting over where you already have evidence.</a:t>
+              <a:t>"Pause here if you want to write them down." Hold long enough for that to be possible.</a:t>
+            </a:r>
+          </a:p>
+          <a:p>
+            <a:r>
+              <a:t>Close on the reframe: not proving you will never have to learn anything new, but not starting over where you already have proof.</a:t>
             </a:r>
           </a:p>
         </p:txBody>
@@ -1698,27 +1728,32 @@
           </a:p>
           <a:p>
             <a:r>
-              <a:t>Timing: approximately 8:43.</a:t>
-            </a:r>
-          </a:p>
-          <a:p>
-            <a:r>
-              <a:t>Calm and brief. This is the only resource invitation in the video, and it is the FREE Career Evidence Starter.</a:t>
-            </a:r>
-          </a:p>
-          <a:p>
-            <a:r>
-              <a:t>Exact invitation, verbatim from the v4.0 script:</a:t>
-            </a:r>
-          </a:p>
-          <a:p>
-            <a:r>
-              <a:t>"If you want to try this on one real accomplishment of yours, I made a free Career Evidence Starter. It takes about 10 to 15 focused minutes and helps you turn one piece of work into a portable Proof Line. I've linked it below."</a:t>
-            </a:r>
-          </a:p>
-          <a:p>
-            <a:r>
-              <a:t>The supporting artwork on this slide is the REAL Career Evidence Starter artifact: the cover in front, the Portable Proof Line page behind. No Field Kit imagery remains anywhere in either deck; do not restore it. Use the direct public landing-page URL only — no PDF link.</a:t>
+              <a:t>Timing: approximately 10:48.</a:t>
+            </a:r>
+          </a:p>
+          <a:p>
+            <a:r>
+              <a:t>Calm and brief. The only resource invitation in the video, and it is the FREE Career Evidence Starter.</a:t>
+            </a:r>
+          </a:p>
+          <a:p>
+            <a:r>
+              <a:t>It lands AFTER the identity bridge, so it reads as the next step in what she has just described rather than an advert. Keep that order.</a:t>
+            </a:r>
+          </a:p>
+          <a:p>
+            <a:r>
+              <a:t>Exact invitation, verbatim from the v5.0 script:</a:t>
+            </a:r>
+          </a:p>
+          <a:p>
+            <a:r>
+              <a:t>"If you want to try this on one real thing you have done, I made a free Career Evidence Starter. It takes about 10 to 15 focused minutes, and you come out of it with one accomplishment turned into a portable proof line — one sentence you can actually use. I have linked it below."</a:t>
+            </a:r>
+          </a:p>
+          <a:p>
+            <a:r>
+              <a:t>The artwork on this slide is the REAL Career Evidence Starter artifact: cover in front, Portable Proof Line page behind. No Field Kit imagery remains anywhere; do not restore it. Direct public landing-page URL only — no PDF link.</a:t>
             </a:r>
           </a:p>
         </p:txBody>
@@ -1793,22 +1828,22 @@
           </a:p>
           <a:p>
             <a:r>
-              <a:t>Timing: approximately 9:01 to the end, about 9:43.</a:t>
-            </a:r>
-          </a:p>
-          <a:p>
-            <a:r>
-              <a:t>The card reads "Is Your Job Making You Less Marketable?", which is the locked Video 2 title and matches what Temidayo says.</a:t>
-            </a:r>
-          </a:p>
-          <a:p>
-            <a:r>
-              <a:t>Closing lines: "You do not have to erase your career to change jobs. But you do need to know what you are carrying." Stay on her for both.</a:t>
-            </a:r>
-          </a:p>
-          <a:p>
-            <a:r>
-              <a:t>Do not summarize this video again.</a:t>
+              <a:t>Timing: approximately 11:10 to the end, about 11:54.</a:t>
+            </a:r>
+          </a:p>
+          <a:p>
+            <a:r>
+              <a:t>The card reads "Is Your Job Making You Less Marketable?", the locked Video 2 title, matching what Temidayo says.</a:t>
+            </a:r>
+          </a:p>
+          <a:p>
+            <a:r>
+              <a:t>Closing lines: "You do not have to erase your career to change jobs. But you do have to know what you are carrying." Stay on her for both.</a:t>
+            </a:r>
+          </a:p>
+          <a:p>
+            <a:r>
+              <a:t>Do not summarize the video again.</a:t>
             </a:r>
           </a:p>
           <a:p>
@@ -1888,12 +1923,17 @@
           </a:p>
           <a:p>
             <a:r>
-              <a:t>Timing: approximately 2:15, holding to about 2:19.</a:t>
-            </a:r>
-          </a:p>
-          <a:p>
-            <a:r>
-              <a:t>Section card. Hold briefly, then return to presenter.</a:t>
+              <a:t>Timing: approximately 3:09, holding to about 3:13.</a:t>
+            </a:r>
+          </a:p>
+          <a:p>
+            <a:r>
+              <a:t>Section card. Hold briefly, then back to presenter.</a:t>
+            </a:r>
+          </a:p>
+          <a:p>
+            <a:r>
+              <a:t>Note that the framework does not arrive until now, at over three minutes. That is deliberate under v5.0: the viewer is identified before they are educated.</a:t>
             </a:r>
           </a:p>
         </p:txBody>
@@ -1968,7 +2008,7 @@
           </a:p>
           <a:p>
             <a:r>
-              <a:t>Timing: approximately 2:19.</a:t>
+              <a:t>Timing: approximately 3:13.</a:t>
             </a:r>
           </a:p>
           <a:p>
@@ -1978,17 +2018,17 @@
           </a:p>
           <a:p>
             <a:r>
-              <a:t>Note the v4.0 framing: "The questions on screen are the ones I use, and I want you to use them too." Keep her on camera for it.</a:t>
-            </a:r>
-          </a:p>
-          <a:p>
-            <a:r>
-              <a:t>Her own nouns — accounting, cybersecurity, people strategy — are named once and then set against the recurring forms of judgment. Do not turn that into a claim that they are one profession.</a:t>
-            </a:r>
-          </a:p>
-          <a:p>
-            <a:r>
-              <a:t>Close on the portability boundary: capability can travel while context still has to be learned. "That is not starting from zero. That is carrying something proven into a real learning curve." Do not cut it.</a:t>
+              <a:t>"The questions on screen are the ones I use, and I would like you to use them on yourself." Keep her on camera for it.</a:t>
+            </a:r>
+          </a:p>
+          <a:p>
+            <a:r>
+              <a:t>The warning in this section is "a word is not evidence". The exercise — three moments where people relied on your judgment, then the verb that repeats — is the practical core. Give it room.</a:t>
+            </a:r>
+          </a:p>
+          <a:p>
+            <a:r>
+              <a:t>Close on the boundary: capability can travel while the context still has to be learned. "That is not starting from zero. That is bringing something proven into a real learning curve." </a:t>
             </a:r>
           </a:p>
         </p:txBody>
@@ -2063,7 +2103,7 @@
           </a:p>
           <a:p>
             <a:r>
-              <a:t>Timing: approximately 2:19.</a:t>
+              <a:t>Timing: approximately 3:13.</a:t>
             </a:r>
           </a:p>
           <a:p>
@@ -2073,17 +2113,17 @@
           </a:p>
           <a:p>
             <a:r>
-              <a:t>Note the v4.0 framing: "The questions on screen are the ones I use, and I want you to use them too." Keep her on camera for it.</a:t>
-            </a:r>
-          </a:p>
-          <a:p>
-            <a:r>
-              <a:t>Her own nouns — accounting, cybersecurity, people strategy — are named once and then set against the recurring forms of judgment. Do not turn that into a claim that they are one profession.</a:t>
-            </a:r>
-          </a:p>
-          <a:p>
-            <a:r>
-              <a:t>Close on the portability boundary: capability can travel while context still has to be learned. "That is not starting from zero. That is carrying something proven into a real learning curve." Do not cut it.</a:t>
+              <a:t>"The questions on screen are the ones I use, and I would like you to use them on yourself." Keep her on camera for it.</a:t>
+            </a:r>
+          </a:p>
+          <a:p>
+            <a:r>
+              <a:t>The warning in this section is "a word is not evidence". The exercise — three moments where people relied on your judgment, then the verb that repeats — is the practical core. Give it room.</a:t>
+            </a:r>
+          </a:p>
+          <a:p>
+            <a:r>
+              <a:t>Close on the boundary: capability can travel while the context still has to be learned. "That is not starting from zero. That is bringing something proven into a real learning curve." </a:t>
             </a:r>
           </a:p>
         </p:txBody>
@@ -2158,7 +2198,7 @@
           </a:p>
           <a:p>
             <a:r>
-              <a:t>Timing: approximately 2:19.</a:t>
+              <a:t>Timing: approximately 3:13.</a:t>
             </a:r>
           </a:p>
           <a:p>
@@ -2168,17 +2208,17 @@
           </a:p>
           <a:p>
             <a:r>
-              <a:t>Note the v4.0 framing: "The questions on screen are the ones I use, and I want you to use them too." Keep her on camera for it.</a:t>
-            </a:r>
-          </a:p>
-          <a:p>
-            <a:r>
-              <a:t>Her own nouns — accounting, cybersecurity, people strategy — are named once and then set against the recurring forms of judgment. Do not turn that into a claim that they are one profession.</a:t>
-            </a:r>
-          </a:p>
-          <a:p>
-            <a:r>
-              <a:t>Close on the portability boundary: capability can travel while context still has to be learned. "That is not starting from zero. That is carrying something proven into a real learning curve." Do not cut it.</a:t>
+              <a:t>"The questions on screen are the ones I use, and I would like you to use them on yourself." Keep her on camera for it.</a:t>
+            </a:r>
+          </a:p>
+          <a:p>
+            <a:r>
+              <a:t>The warning in this section is "a word is not evidence". The exercise — three moments where people relied on your judgment, then the verb that repeats — is the practical core. Give it room.</a:t>
+            </a:r>
+          </a:p>
+          <a:p>
+            <a:r>
+              <a:t>Close on the boundary: capability can travel while the context still has to be learned. "That is not starting from zero. That is bringing something proven into a real learning curve." </a:t>
             </a:r>
           </a:p>
         </p:txBody>
@@ -2253,12 +2293,12 @@
           </a:p>
           <a:p>
             <a:r>
-              <a:t>Timing: approximately 4:03, holding to about 4:07.</a:t>
-            </a:r>
-          </a:p>
-          <a:p>
-            <a:r>
-              <a:t>Section card. Hold briefly, then return to presenter.</a:t>
+              <a:t>Timing: approximately 4:57, holding to about 5:02.</a:t>
+            </a:r>
+          </a:p>
+          <a:p>
+            <a:r>
+              <a:t>Section card. Hold briefly, then back to presenter.</a:t>
             </a:r>
           </a:p>
         </p:txBody>
@@ -2333,22 +2373,22 @@
           </a:p>
           <a:p>
             <a:r>
-              <a:t>Timing: approximately 4:07.</a:t>
-            </a:r>
-          </a:p>
-          <a:p>
-            <a:r>
-              <a:t>Show the internal description first, then the clearer version.</a:t>
-            </a:r>
-          </a:p>
-          <a:p>
-            <a:r>
-              <a:t>"Let me show you the more useful version" is the coaching turn. Stay on Temidayo.</a:t>
-            </a:r>
-          </a:p>
-          <a:p>
-            <a:r>
-              <a:t>The point is explicitly NOT that a number is better: "That sentence is not better simply because it includes a number." Keep that qualifier.</a:t>
+              <a:t>Timing: approximately 5:02.</a:t>
+            </a:r>
+          </a:p>
+          <a:p>
+            <a:r>
+              <a:t>Show the internal description first, then the version that carries.</a:t>
+            </a:r>
+          </a:p>
+          <a:p>
+            <a:r>
+              <a:t>The point is explicitly NOT that a number is better: "That sentence is not better because it has a number in it." Keep that qualifier — it is the whole teaching point of the slide.</a:t>
+            </a:r>
+          </a:p>
+          <a:p>
+            <a:r>
+              <a:t>Three questions follow: what was different because I was there, what became clearer or faster or safer or more possible, and what can I say without stretching it.</a:t>
             </a:r>
           </a:p>
         </p:txBody>
@@ -2423,22 +2463,22 @@
           </a:p>
           <a:p>
             <a:r>
-              <a:t>Timing: approximately 4:07.</a:t>
-            </a:r>
-          </a:p>
-          <a:p>
-            <a:r>
-              <a:t>Show the internal description first, then the clearer version.</a:t>
-            </a:r>
-          </a:p>
-          <a:p>
-            <a:r>
-              <a:t>"Let me show you the more useful version" is the coaching turn. Stay on Temidayo.</a:t>
-            </a:r>
-          </a:p>
-          <a:p>
-            <a:r>
-              <a:t>The point is explicitly NOT that a number is better: "That sentence is not better simply because it includes a number." Keep that qualifier.</a:t>
+              <a:t>Timing: approximately 5:02.</a:t>
+            </a:r>
+          </a:p>
+          <a:p>
+            <a:r>
+              <a:t>Show the internal description first, then the version that carries.</a:t>
+            </a:r>
+          </a:p>
+          <a:p>
+            <a:r>
+              <a:t>The point is explicitly NOT that a number is better: "That sentence is not better because it has a number in it." Keep that qualifier — it is the whole teaching point of the slide.</a:t>
+            </a:r>
+          </a:p>
+          <a:p>
+            <a:r>
+              <a:t>Three questions follow: what was different because I was there, what became clearer or faster or safer or more possible, and what can I say without stretching it.</a:t>
             </a:r>
           </a:p>
         </p:txBody>

--- a/deliverables/video-1-slides/out/Video-1-Reveal-Builds_v2.4.pptx
+++ b/deliverables/video-1-slides/out/Video-1-Reveal-Builds_v2.4.pptx
@@ -528,32 +528,42 @@
           </a:p>
           <a:p>
             <a:r>
-              <a:t>Timing: approximately 0:39 to 1:31.</a:t>
-            </a:r>
-          </a:p>
-          <a:p>
-            <a:r>
-              <a:t>Do NOT open on this slide. Begin full-screen on Temidayo and let the whole opening land first: the viewer's situation, the question underneath it, "I know that question, I have had to answer it more than once", the honest answer, and the three-practice promise.</a:t>
-            </a:r>
-          </a:p>
-          <a:p>
-            <a:r>
-              <a:t>Recognition comes before anything is taught. Nothing may cut into that.</a:t>
-            </a:r>
-          </a:p>
-          <a:p>
-            <a:r>
-              <a:t>Bring the title up under the channel line, then hold for the promise boundary: "I cannot tell you that everything transfers, because it does not."</a:t>
-            </a:r>
-          </a:p>
-          <a:p>
-            <a:r>
-              <a:t>That refusal is what makes the rest of the video believable. Do not soften it.</a:t>
-            </a:r>
-          </a:p>
-          <a:p>
-            <a:r>
-              <a:t>The on-screen deck title and the public YouTube title differ intentionally. Do not change the title slide to match the public title.</a:t>
+              <a:t>Timing: approximately 1:00.</a:t>
+            </a:r>
+          </a:p>
+          <a:p>
+            <a:r>
+              <a:t>Slide 1 — Title.</a:t>
+            </a:r>
+          </a:p>
+          <a:p>
+            <a:r>
+              <a:t>Cue — the line that lands on this slide: “I’m Temidayo Afonja.”</a:t>
+            </a:r>
+          </a:p>
+          <a:p>
+            <a:r>
+              <a:t>Do NOT open on this slide. Begin full screen on Temidayo and let the whole opening land: the viewer's exposure, the rescinded offer, driving Uber, and the promise of three practices.</a:t>
+            </a:r>
+          </a:p>
+          <a:p>
+            <a:r>
+              <a:t>Bring the title card in only on “I’m Temidayo Afonja.”</a:t>
+            </a:r>
+          </a:p>
+          <a:p>
+            <a:r>
+              <a:t>The on-screen deck title reads “How I Changed Jobs Without Starting My Career Over” and differs from the public title on purpose. Do not change it.</a:t>
+            </a:r>
+          </a:p>
+          <a:p>
+            <a:r>
+              <a:t>What follows on this slide is the honest promise — not everything transfers, markets change, skills go stale, and the next opportunity may not arrive quickly. That paragraph is what earns the rest of the video. Do not trim it for pace.</a:t>
+            </a:r>
+          </a:p>
+          <a:p>
+            <a:r>
+              <a:t>Single state. Reveal frame 1 in the build deck.</a:t>
             </a:r>
           </a:p>
         </p:txBody>
@@ -628,27 +638,42 @@
           </a:p>
           <a:p>
             <a:r>
-              <a:t>Timing: approximately 6:09.</a:t>
-            </a:r>
-          </a:p>
-          <a:p>
-            <a:r>
-              <a:t>The bounded result slide. Reveal 47, then 75.</a:t>
-            </a:r>
-          </a:p>
-          <a:p>
-            <a:r>
-              <a:t>FACTUAL BOUNDARY, spoken aloud and not to be trimmed: ONE measure of how well new hires felt integrated, not a claim about everything the redesign touched; and team work that Temidayo LED, not solo work.</a:t>
-            </a:r>
-          </a:p>
-          <a:p>
-            <a:r>
-              <a:t>The v5.0 line to protect is "People trust the person who tells them the edges of their own claim." That is the reason this slide exists.</a:t>
-            </a:r>
-          </a:p>
-          <a:p>
-            <a:r>
-              <a:t>Do not add the ~30% retention improvement or the &gt;$2M avoided-turnover figure. Neither is in this video and neither may appear in any graphic or caption.</a:t>
+              <a:t>Timing: approximately 6:21.</a:t>
+            </a:r>
+          </a:p>
+          <a:p>
+            <a:r>
+              <a:t>Slide 7 — One Result — 47 to 75.</a:t>
+            </a:r>
+          </a:p>
+          <a:p>
+            <a:r>
+              <a:t>Cue — the line that lands on this slide: “It is stronger because somebody who was not there can hear what I led and what changed.”</a:t>
+            </a:r>
+          </a:p>
+          <a:p>
+            <a:r>
+              <a:t>FACTUAL BOUNDARY: one measure of how well new hires felt integrated moved from 47 to 75. It is NOT retention, turnover, cost or engagement, and it is not a claim about everything the redesign touched. It was team work that Temidayo led.</a:t>
+            </a:r>
+          </a:p>
+          <a:p>
+            <a:r>
+              <a:t>No 30% and no $2M anywhere in this video.</a:t>
+            </a:r>
+          </a:p>
+          <a:p>
+            <a:r>
+              <a:t>The precision paragraph is the trust beat. “People trust the person who tells them the edges of their own claim.” Keep it on her face.</a:t>
+            </a:r>
+          </a:p>
+          <a:p>
+            <a:r>
+              <a:t>The three questions that follow reveal one at a time.</a:t>
+            </a:r>
+          </a:p>
+          <a:p>
+            <a:r>
+              <a:t>Reveal states: 2. Reveal frame 10–11 in the build deck.</a:t>
             </a:r>
           </a:p>
         </p:txBody>
@@ -723,27 +748,42 @@
           </a:p>
           <a:p>
             <a:r>
-              <a:t>Timing: approximately 6:09.</a:t>
-            </a:r>
-          </a:p>
-          <a:p>
-            <a:r>
-              <a:t>The bounded result slide. Reveal 47, then 75.</a:t>
-            </a:r>
-          </a:p>
-          <a:p>
-            <a:r>
-              <a:t>FACTUAL BOUNDARY, spoken aloud and not to be trimmed: ONE measure of how well new hires felt integrated, not a claim about everything the redesign touched; and team work that Temidayo LED, not solo work.</a:t>
-            </a:r>
-          </a:p>
-          <a:p>
-            <a:r>
-              <a:t>The v5.0 line to protect is "People trust the person who tells them the edges of their own claim." That is the reason this slide exists.</a:t>
-            </a:r>
-          </a:p>
-          <a:p>
-            <a:r>
-              <a:t>Do not add the ~30% retention improvement or the &gt;$2M avoided-turnover figure. Neither is in this video and neither may appear in any graphic or caption.</a:t>
+              <a:t>Timing: approximately 6:21.</a:t>
+            </a:r>
+          </a:p>
+          <a:p>
+            <a:r>
+              <a:t>Slide 7 — One Result — 47 to 75.</a:t>
+            </a:r>
+          </a:p>
+          <a:p>
+            <a:r>
+              <a:t>Cue — the line that lands on this slide: “It is stronger because somebody who was not there can hear what I led and what changed.”</a:t>
+            </a:r>
+          </a:p>
+          <a:p>
+            <a:r>
+              <a:t>FACTUAL BOUNDARY: one measure of how well new hires felt integrated moved from 47 to 75. It is NOT retention, turnover, cost or engagement, and it is not a claim about everything the redesign touched. It was team work that Temidayo led.</a:t>
+            </a:r>
+          </a:p>
+          <a:p>
+            <a:r>
+              <a:t>No 30% and no $2M anywhere in this video.</a:t>
+            </a:r>
+          </a:p>
+          <a:p>
+            <a:r>
+              <a:t>The precision paragraph is the trust beat. “People trust the person who tells them the edges of their own claim.” Keep it on her face.</a:t>
+            </a:r>
+          </a:p>
+          <a:p>
+            <a:r>
+              <a:t>The three questions that follow reveal one at a time.</a:t>
+            </a:r>
+          </a:p>
+          <a:p>
+            <a:r>
+              <a:t>Reveal states: 2. Reveal frame 10–11 in the build deck.</a:t>
             </a:r>
           </a:p>
         </p:txBody>
@@ -818,12 +858,27 @@
           </a:p>
           <a:p>
             <a:r>
-              <a:t>Timing: approximately 6:52, holding to about 6:57.</a:t>
-            </a:r>
-          </a:p>
-          <a:p>
-            <a:r>
-              <a:t>Section card. Hold briefly, then back to presenter.</a:t>
+              <a:t>Timing: approximately 7:11.</a:t>
+            </a:r>
+          </a:p>
+          <a:p>
+            <a:r>
+              <a:t>Slide 8 — 03 Keep Evidence Before You Need It.</a:t>
+            </a:r>
+          </a:p>
+          <a:p>
+            <a:r>
+              <a:t>Cue — the line that lands on this slide: “The third practice is to keep the evidence before you need it.”</a:t>
+            </a:r>
+          </a:p>
+          <a:p>
+            <a:r>
+              <a:t>Section break only.</a:t>
+            </a:r>
+          </a:p>
+          <a:p>
+            <a:r>
+              <a:t>Single state. Reveal frame 12 in the build deck.</a:t>
             </a:r>
           </a:p>
         </p:txBody>
@@ -898,22 +953,37 @@
           </a:p>
           <a:p>
             <a:r>
-              <a:t>Timing: approximately 6:57.</a:t>
-            </a:r>
-          </a:p>
-          <a:p>
-            <a:r>
-              <a:t>Reveal the four lines: the situation, my role, what changed, what this shows.</a:t>
-            </a:r>
-          </a:p>
-          <a:p>
-            <a:r>
-              <a:t>The permitted-record boundary is spoken — in your own words, nothing confidential, nothing employer-owned. Do not edit around it.</a:t>
-            </a:r>
-          </a:p>
-          <a:p>
-            <a:r>
-              <a:t>The "what this shows" line is the honesty test: the smallest claim the evidence can hold. Temidayo models it on herself first, then extends it to the viewer: "I do not want you to stretch yours either." </a:t>
+              <a:t>Timing: approximately 7:16.</a:t>
+            </a:r>
+          </a:p>
+          <a:p>
+            <a:r>
+              <a:t>Slide 9 — Move Three.</a:t>
+            </a:r>
+          </a:p>
+          <a:p>
+            <a:r>
+              <a:t>Cue — the line that lands on this slide: “Most of us wait until there is a CV to update, or an interview on Thursday.”</a:t>
+            </a:r>
+          </a:p>
+          <a:p>
+            <a:r>
+              <a:t>The four evidence lines reveal one at a time: the situation, your role, what changed, what this shows.</a:t>
+            </a:r>
+          </a:p>
+          <a:p>
+            <a:r>
+              <a:t>“When the role went away, the hardest thing to reconstruct was not what I had done. It was the detail that made it believable.” This ties the practice back to the opening story. Do not cut it — it is the reason this section is in this video rather than a generic tip.</a:t>
+            </a:r>
+          </a:p>
+          <a:p>
+            <a:r>
+              <a:t>EVIDENCE BOUNDARY: in your own words, nothing confidential, nothing belonging to the employer. Spoken plainly, not as fine print.</a:t>
+            </a:r>
+          </a:p>
+          <a:p>
+            <a:r>
+              <a:t>Reveal states: 4. Reveal frame 13–16 in the build deck.</a:t>
             </a:r>
           </a:p>
         </p:txBody>
@@ -988,22 +1058,37 @@
           </a:p>
           <a:p>
             <a:r>
-              <a:t>Timing: approximately 6:57.</a:t>
-            </a:r>
-          </a:p>
-          <a:p>
-            <a:r>
-              <a:t>Reveal the four lines: the situation, my role, what changed, what this shows.</a:t>
-            </a:r>
-          </a:p>
-          <a:p>
-            <a:r>
-              <a:t>The permitted-record boundary is spoken — in your own words, nothing confidential, nothing employer-owned. Do not edit around it.</a:t>
-            </a:r>
-          </a:p>
-          <a:p>
-            <a:r>
-              <a:t>The "what this shows" line is the honesty test: the smallest claim the evidence can hold. Temidayo models it on herself first, then extends it to the viewer: "I do not want you to stretch yours either." </a:t>
+              <a:t>Timing: approximately 7:16.</a:t>
+            </a:r>
+          </a:p>
+          <a:p>
+            <a:r>
+              <a:t>Slide 9 — Move Three.</a:t>
+            </a:r>
+          </a:p>
+          <a:p>
+            <a:r>
+              <a:t>Cue — the line that lands on this slide: “Most of us wait until there is a CV to update, or an interview on Thursday.”</a:t>
+            </a:r>
+          </a:p>
+          <a:p>
+            <a:r>
+              <a:t>The four evidence lines reveal one at a time: the situation, your role, what changed, what this shows.</a:t>
+            </a:r>
+          </a:p>
+          <a:p>
+            <a:r>
+              <a:t>“When the role went away, the hardest thing to reconstruct was not what I had done. It was the detail that made it believable.” This ties the practice back to the opening story. Do not cut it — it is the reason this section is in this video rather than a generic tip.</a:t>
+            </a:r>
+          </a:p>
+          <a:p>
+            <a:r>
+              <a:t>EVIDENCE BOUNDARY: in your own words, nothing confidential, nothing belonging to the employer. Spoken plainly, not as fine print.</a:t>
+            </a:r>
+          </a:p>
+          <a:p>
+            <a:r>
+              <a:t>Reveal states: 4. Reveal frame 13–16 in the build deck.</a:t>
             </a:r>
           </a:p>
         </p:txBody>
@@ -1078,22 +1163,37 @@
           </a:p>
           <a:p>
             <a:r>
-              <a:t>Timing: approximately 6:57.</a:t>
-            </a:r>
-          </a:p>
-          <a:p>
-            <a:r>
-              <a:t>Reveal the four lines: the situation, my role, what changed, what this shows.</a:t>
-            </a:r>
-          </a:p>
-          <a:p>
-            <a:r>
-              <a:t>The permitted-record boundary is spoken — in your own words, nothing confidential, nothing employer-owned. Do not edit around it.</a:t>
-            </a:r>
-          </a:p>
-          <a:p>
-            <a:r>
-              <a:t>The "what this shows" line is the honesty test: the smallest claim the evidence can hold. Temidayo models it on herself first, then extends it to the viewer: "I do not want you to stretch yours either." </a:t>
+              <a:t>Timing: approximately 7:16.</a:t>
+            </a:r>
+          </a:p>
+          <a:p>
+            <a:r>
+              <a:t>Slide 9 — Move Three.</a:t>
+            </a:r>
+          </a:p>
+          <a:p>
+            <a:r>
+              <a:t>Cue — the line that lands on this slide: “Most of us wait until there is a CV to update, or an interview on Thursday.”</a:t>
+            </a:r>
+          </a:p>
+          <a:p>
+            <a:r>
+              <a:t>The four evidence lines reveal one at a time: the situation, your role, what changed, what this shows.</a:t>
+            </a:r>
+          </a:p>
+          <a:p>
+            <a:r>
+              <a:t>“When the role went away, the hardest thing to reconstruct was not what I had done. It was the detail that made it believable.” This ties the practice back to the opening story. Do not cut it — it is the reason this section is in this video rather than a generic tip.</a:t>
+            </a:r>
+          </a:p>
+          <a:p>
+            <a:r>
+              <a:t>EVIDENCE BOUNDARY: in your own words, nothing confidential, nothing belonging to the employer. Spoken plainly, not as fine print.</a:t>
+            </a:r>
+          </a:p>
+          <a:p>
+            <a:r>
+              <a:t>Reveal states: 4. Reveal frame 13–16 in the build deck.</a:t>
             </a:r>
           </a:p>
         </p:txBody>
@@ -1168,22 +1268,37 @@
           </a:p>
           <a:p>
             <a:r>
-              <a:t>Timing: approximately 6:57.</a:t>
-            </a:r>
-          </a:p>
-          <a:p>
-            <a:r>
-              <a:t>Reveal the four lines: the situation, my role, what changed, what this shows.</a:t>
-            </a:r>
-          </a:p>
-          <a:p>
-            <a:r>
-              <a:t>The permitted-record boundary is spoken — in your own words, nothing confidential, nothing employer-owned. Do not edit around it.</a:t>
-            </a:r>
-          </a:p>
-          <a:p>
-            <a:r>
-              <a:t>The "what this shows" line is the honesty test: the smallest claim the evidence can hold. Temidayo models it on herself first, then extends it to the viewer: "I do not want you to stretch yours either." </a:t>
+              <a:t>Timing: approximately 7:16.</a:t>
+            </a:r>
+          </a:p>
+          <a:p>
+            <a:r>
+              <a:t>Slide 9 — Move Three.</a:t>
+            </a:r>
+          </a:p>
+          <a:p>
+            <a:r>
+              <a:t>Cue — the line that lands on this slide: “Most of us wait until there is a CV to update, or an interview on Thursday.”</a:t>
+            </a:r>
+          </a:p>
+          <a:p>
+            <a:r>
+              <a:t>The four evidence lines reveal one at a time: the situation, your role, what changed, what this shows.</a:t>
+            </a:r>
+          </a:p>
+          <a:p>
+            <a:r>
+              <a:t>“When the role went away, the hardest thing to reconstruct was not what I had done. It was the detail that made it believable.” This ties the practice back to the opening story. Do not cut it — it is the reason this section is in this video rather than a generic tip.</a:t>
+            </a:r>
+          </a:p>
+          <a:p>
+            <a:r>
+              <a:t>EVIDENCE BOUNDARY: in your own words, nothing confidential, nothing belonging to the employer. Spoken plainly, not as fine print.</a:t>
+            </a:r>
+          </a:p>
+          <a:p>
+            <a:r>
+              <a:t>Reveal states: 4. Reveal frame 13–16 in the build deck.</a:t>
             </a:r>
           </a:p>
         </p:txBody>
@@ -1258,32 +1373,37 @@
           </a:p>
           <a:p>
             <a:r>
-              <a:t>Timing: approximately 8:26.</a:t>
-            </a:r>
-          </a:p>
-          <a:p>
-            <a:r>
-              <a:t>The consolidation card, and then the most important stretch in the video.</a:t>
-            </a:r>
-          </a:p>
-          <a:p>
-            <a:r>
-              <a:t>Reveal the three practices in order. Then two mistakes: assuming everything transfers, and assuming nothing does. Both halves matter.</a:t>
-            </a:r>
-          </a:p>
-          <a:p>
-            <a:r>
-              <a:t>Then the honest limits — this will not stop a restructure, will not decide a hiring market, will not remove caregiving, money, health, timing or geography from the decision. Do not cut them to save time; they are why the promise is credible.</a:t>
-            </a:r>
-          </a:p>
-          <a:p>
-            <a:r>
-              <a:t>IDENTITY EXIT, at about 9:22: "I am not only trying to help you get through one job change. I want you to get to the point where a new context does not make you forget what you already know how to do."</a:t>
-            </a:r>
-          </a:p>
-          <a:p>
-            <a:r>
-              <a:t>That is the point of the video. If the edit runs long, cut something else.</a:t>
+              <a:t>Timing: approximately 8:46.</a:t>
+            </a:r>
+          </a:p>
+          <a:p>
+            <a:r>
+              <a:t>Slide 10 — Three Things I Learned to Do.</a:t>
+            </a:r>
+          </a:p>
+          <a:p>
+            <a:r>
+              <a:t>Cue — the line that lands on this slide: “So those are the three.”</a:t>
+            </a:r>
+          </a:p>
+          <a:p>
+            <a:r>
+              <a:t>The three practices come back on screen together for the first time.</a:t>
+            </a:r>
+          </a:p>
+          <a:p>
+            <a:r>
+              <a:t>Then the two mistakes, then the honest limits. The limits paragraph names the things this does not control — restructures, hiring markets, money, caregiving, health, timing, location — and says plainly that it would not have stopped her own role being rescinded or made the next opportunity arrive sooner.</a:t>
+            </a:r>
+          </a:p>
+          <a:p>
+            <a:r>
+              <a:t>That paragraph is not a disclaimer. It is the reason the viewer can believe the rest. Do not shorten it.</a:t>
+            </a:r>
+          </a:p>
+          <a:p>
+            <a:r>
+              <a:t>Single state. Reveal frame 17 in the build deck.</a:t>
             </a:r>
           </a:p>
         </p:txBody>
@@ -1358,22 +1478,37 @@
           </a:p>
           <a:p>
             <a:r>
-              <a:t>Timing: approximately 9:50.</a:t>
-            </a:r>
-          </a:p>
-          <a:p>
-            <a:r>
-              <a:t>Reveal the three questions one at a time.</a:t>
-            </a:r>
-          </a:p>
-          <a:p>
-            <a:r>
-              <a:t>"Pause here if you want to write them down." Hold long enough for that to be possible.</a:t>
-            </a:r>
-          </a:p>
-          <a:p>
-            <a:r>
-              <a:t>Close on the reframe: not proving you will never have to learn anything new, but not starting over where you already have proof.</a:t>
+              <a:t>Timing: approximately 9:45.</a:t>
+            </a:r>
+          </a:p>
+          <a:p>
+            <a:r>
+              <a:t>Slide 11 — Before Your Next Move.</a:t>
+            </a:r>
+          </a:p>
+          <a:p>
+            <a:r>
+              <a:t>Cue — the line that lands on this slide: “So before your next move, sit with three questions.”</a:t>
+            </a:r>
+          </a:p>
+          <a:p>
+            <a:r>
+              <a:t>Three questions, revealed one at a time, then held together.</a:t>
+            </a:r>
+          </a:p>
+          <a:p>
+            <a:r>
+              <a:t>Leave a real beat after “Pause here if you want to write them down.” The pause is part of the design.</a:t>
+            </a:r>
+          </a:p>
+          <a:p>
+            <a:r>
+              <a:t>THE IDENTITY EXIT sits at the end of this slide: “I want you to reach the point where a change in your circumstances does not make you forget what you know how to do.” It answers the opening story directly. If the edit runs long, cut something else.</a:t>
+            </a:r>
+          </a:p>
+          <a:p>
+            <a:r>
+              <a:t>Reveal states: 3. Reveal frame 18–20 in the build deck.</a:t>
             </a:r>
           </a:p>
         </p:txBody>
@@ -1448,22 +1583,37 @@
           </a:p>
           <a:p>
             <a:r>
-              <a:t>Timing: approximately 9:50.</a:t>
-            </a:r>
-          </a:p>
-          <a:p>
-            <a:r>
-              <a:t>Reveal the three questions one at a time.</a:t>
-            </a:r>
-          </a:p>
-          <a:p>
-            <a:r>
-              <a:t>"Pause here if you want to write them down." Hold long enough for that to be possible.</a:t>
-            </a:r>
-          </a:p>
-          <a:p>
-            <a:r>
-              <a:t>Close on the reframe: not proving you will never have to learn anything new, but not starting over where you already have proof.</a:t>
+              <a:t>Timing: approximately 9:45.</a:t>
+            </a:r>
+          </a:p>
+          <a:p>
+            <a:r>
+              <a:t>Slide 11 — Before Your Next Move.</a:t>
+            </a:r>
+          </a:p>
+          <a:p>
+            <a:r>
+              <a:t>Cue — the line that lands on this slide: “So before your next move, sit with three questions.”</a:t>
+            </a:r>
+          </a:p>
+          <a:p>
+            <a:r>
+              <a:t>Three questions, revealed one at a time, then held together.</a:t>
+            </a:r>
+          </a:p>
+          <a:p>
+            <a:r>
+              <a:t>Leave a real beat after “Pause here if you want to write them down.” The pause is part of the design.</a:t>
+            </a:r>
+          </a:p>
+          <a:p>
+            <a:r>
+              <a:t>THE IDENTITY EXIT sits at the end of this slide: “I want you to reach the point where a change in your circumstances does not make you forget what you know how to do.” It answers the opening story directly. If the edit runs long, cut something else.</a:t>
+            </a:r>
+          </a:p>
+          <a:p>
+            <a:r>
+              <a:t>Reveal states: 3. Reveal frame 18–20 in the build deck.</a:t>
             </a:r>
           </a:p>
         </p:txBody>
@@ -1538,32 +1688,47 @@
           </a:p>
           <a:p>
             <a:r>
-              <a:t>Timing: approximately 1:31.</a:t>
-            </a:r>
-          </a:p>
-          <a:p>
-            <a:r>
-              <a:t>The chronology lives on the slide. Temidayo does not read it back.</a:t>
-            </a:r>
-          </a:p>
-          <a:p>
-            <a:r>
-              <a:t>This is the belonging and lived-proof section. She names the December 2008 accounting degree and the financial crisis exactly as spoken, the real relearning in every move, going back to school, and preparing for a professional certification she did not pass on the first attempt.</a:t>
-            </a:r>
-          </a:p>
-          <a:p>
-            <a:r>
-              <a:t>That non-pass is not a throwaway. It is what earns the "not everything transfers" boundary, and it is why "I am not being modest, I have paid for that lesson" works. Do not cut either.</a:t>
-            </a:r>
-          </a:p>
-          <a:p>
-            <a:r>
-              <a:t>Then the turn: she did not carry the tasks forward, she carried the kind of work people kept trusting her with. And the question she asks herself changes.</a:t>
-            </a:r>
-          </a:p>
-          <a:p>
-            <a:r>
-              <a:t>Temidayo is evidence here, not the hero. If a cut makes her the subject rather than the proof, it is the wrong cut.</a:t>
+              <a:t>Timing: approximately 1:37.</a:t>
+            </a:r>
+          </a:p>
+          <a:p>
+            <a:r>
+              <a:t>Slide 2 — My Career Path.</a:t>
+            </a:r>
+          </a:p>
+          <a:p>
+            <a:r>
+              <a:t>Cue — the line that lands on this slide: “The role had disappeared.”</a:t>
+            </a:r>
+          </a:p>
+          <a:p>
+            <a:r>
+              <a:t>This slide holds the belonging beat and then the career sequence, in that order. Hold the career-path artwork back until “My path has crossed accounting and audit”. Before that, stay on Temidayo.</a:t>
+            </a:r>
+          </a:p>
+          <a:p>
+            <a:r>
+              <a:t>FACTUAL BOUNDARY, exact: an accepted job offer; an acquisition rescinded the role before she ever got to start it; within a few months she was driving Uber; later a recruiter found her on LinkedIn and asked whether she would consider returning to Deloitte. Nothing else is established. No passenger referral, no networking while driving, no dates, no income, no duration beyond “within a few months”, no recruiter dialogue.</a:t>
+            </a:r>
+          </a:p>
+          <a:p>
+            <a:r>
+              <a:t>CAUSALITY BOUNDARY — ABSOLUTE. “Driving Uber did not lead to Deloitte. They were simply two parts of the same career-transition chapter.” That protection must stay immediately adjacent to the recruiter line. Do not cut it, do not move it, do not separate them with a graphic.</a:t>
+            </a:r>
+          </a:p>
+          <a:p>
+            <a:r>
+              <a:t>NO re-enactment, no car or rideshare footage, no app graphics, no comeback music. This is a recognition story about income uncertainty and loss of context, not a triumph.</a:t>
+            </a:r>
+          </a:p>
+          <a:p>
+            <a:r>
+              <a:t>“The role had disappeared. My experience had not.” is the hinge of the video. Hold on her face. No music swell.</a:t>
+            </a:r>
+          </a:p>
+          <a:p>
+            <a:r>
+              <a:t>Single state. Reveal frame 2 in the build deck.</a:t>
             </a:r>
           </a:p>
         </p:txBody>
@@ -1638,22 +1803,37 @@
           </a:p>
           <a:p>
             <a:r>
-              <a:t>Timing: approximately 9:50.</a:t>
-            </a:r>
-          </a:p>
-          <a:p>
-            <a:r>
-              <a:t>Reveal the three questions one at a time.</a:t>
-            </a:r>
-          </a:p>
-          <a:p>
-            <a:r>
-              <a:t>"Pause here if you want to write them down." Hold long enough for that to be possible.</a:t>
-            </a:r>
-          </a:p>
-          <a:p>
-            <a:r>
-              <a:t>Close on the reframe: not proving you will never have to learn anything new, but not starting over where you already have proof.</a:t>
+              <a:t>Timing: approximately 9:45.</a:t>
+            </a:r>
+          </a:p>
+          <a:p>
+            <a:r>
+              <a:t>Slide 11 — Before Your Next Move.</a:t>
+            </a:r>
+          </a:p>
+          <a:p>
+            <a:r>
+              <a:t>Cue — the line that lands on this slide: “So before your next move, sit with three questions.”</a:t>
+            </a:r>
+          </a:p>
+          <a:p>
+            <a:r>
+              <a:t>Three questions, revealed one at a time, then held together.</a:t>
+            </a:r>
+          </a:p>
+          <a:p>
+            <a:r>
+              <a:t>Leave a real beat after “Pause here if you want to write them down.” The pause is part of the design.</a:t>
+            </a:r>
+          </a:p>
+          <a:p>
+            <a:r>
+              <a:t>THE IDENTITY EXIT sits at the end of this slide: “I want you to reach the point where a change in your circumstances does not make you forget what you know how to do.” It answers the opening story directly. If the edit runs long, cut something else.</a:t>
+            </a:r>
+          </a:p>
+          <a:p>
+            <a:r>
+              <a:t>Reveal states: 3. Reveal frame 18–20 in the build deck.</a:t>
             </a:r>
           </a:p>
         </p:txBody>
@@ -1728,32 +1908,32 @@
           </a:p>
           <a:p>
             <a:r>
-              <a:t>Timing: approximately 10:48.</a:t>
-            </a:r>
-          </a:p>
-          <a:p>
-            <a:r>
-              <a:t>Calm and brief. The only resource invitation in the video, and it is the FREE Career Evidence Starter.</a:t>
-            </a:r>
-          </a:p>
-          <a:p>
-            <a:r>
-              <a:t>It lands AFTER the identity bridge, so it reads as the next step in what she has just described rather than an advert. Keep that order.</a:t>
-            </a:r>
-          </a:p>
-          <a:p>
-            <a:r>
-              <a:t>Exact invitation, verbatim from the v5.0 script:</a:t>
-            </a:r>
-          </a:p>
-          <a:p>
-            <a:r>
-              <a:t>"If you want to try this on one real thing you have done, I made a free Career Evidence Starter. It takes about 10 to 15 focused minutes, and you come out of it with one accomplishment turned into a portable proof line — one sentence you can actually use. I have linked it below."</a:t>
-            </a:r>
-          </a:p>
-          <a:p>
-            <a:r>
-              <a:t>The artwork on this slide is the REAL Career Evidence Starter artifact: cover in front, Portable Proof Line page behind. No Field Kit imagery remains anywhere; do not restore it. Direct public landing-page URL only — no PDF link.</a:t>
+              <a:t>Timing: approximately 10:55.</a:t>
+            </a:r>
+          </a:p>
+          <a:p>
+            <a:r>
+              <a:t>Slide 12 — Career Evidence Starter.</a:t>
+            </a:r>
+          </a:p>
+          <a:p>
+            <a:r>
+              <a:t>Cue — the line that lands on this slide: “If you want to try this on one real thing you have done, I made a free Career Evidence Starter.”</a:t>
+            </a:r>
+          </a:p>
+          <a:p>
+            <a:r>
+              <a:t>Show the REAL Career Evidence Starter artifact, briefly. Do not redraw it, do not mock one up, do not substitute Field Kit imagery, and do not show the direct PDF URL — the landing page URL only.</a:t>
+            </a:r>
+          </a:p>
+          <a:p>
+            <a:r>
+              <a:t>One CTA in this video. Do not add the Field Kit or a second offer.</a:t>
+            </a:r>
+          </a:p>
+          <a:p>
+            <a:r>
+              <a:t>Single state. Reveal frame 21 in the build deck.</a:t>
             </a:r>
           </a:p>
         </p:txBody>
@@ -1828,27 +2008,32 @@
           </a:p>
           <a:p>
             <a:r>
-              <a:t>Timing: approximately 11:10 to the end, about 11:54.</a:t>
-            </a:r>
-          </a:p>
-          <a:p>
-            <a:r>
-              <a:t>The card reads "Is Your Job Making You Less Marketable?", the locked Video 2 title, matching what Temidayo says.</a:t>
-            </a:r>
-          </a:p>
-          <a:p>
-            <a:r>
-              <a:t>Closing lines: "You do not have to erase your career to change jobs. But you do have to know what you are carrying." Stay on her for both.</a:t>
-            </a:r>
-          </a:p>
-          <a:p>
-            <a:r>
-              <a:t>Do not summarize the video again.</a:t>
-            </a:r>
-          </a:p>
-          <a:p>
-            <a:r>
-              <a:t>The right side of the frame is left open for the YouTube linked-video end-screen element. Hold the final frame for at least 12 seconds. Do not leave Subscribe as the only end-screen element.</a:t>
+              <a:t>Timing: approximately 11:15.</a:t>
+            </a:r>
+          </a:p>
+          <a:p>
+            <a:r>
+              <a:t>Slide 13 — Watch Next.</a:t>
+            </a:r>
+          </a:p>
+          <a:p>
+            <a:r>
+              <a:t>Cue — the line that lands on this slide: “Having experience that can travel is not the same as having a job that is still adding to it.”</a:t>
+            </a:r>
+          </a:p>
+          <a:p>
+            <a:r>
+              <a:t>The Video 2 route. Card reads “Is Your Job Making You Less Marketable?”.</a:t>
+            </a:r>
+          </a:p>
+          <a:p>
+            <a:r>
+              <a:t>The last two lines are the sign-off. Let them land clean, with no music sting and no end-card animation over her face.</a:t>
+            </a:r>
+          </a:p>
+          <a:p>
+            <a:r>
+              <a:t>Single state. Reveal frame 22 in the build deck.</a:t>
             </a:r>
           </a:p>
         </p:txBody>
@@ -1923,17 +2108,32 @@
           </a:p>
           <a:p>
             <a:r>
-              <a:t>Timing: approximately 3:09, holding to about 3:13.</a:t>
-            </a:r>
-          </a:p>
-          <a:p>
-            <a:r>
-              <a:t>Section card. Hold briefly, then back to presenter.</a:t>
-            </a:r>
-          </a:p>
-          <a:p>
-            <a:r>
-              <a:t>Note that the framework does not arrive until now, at over three minutes. That is deliberate under v5.0: the viewer is identified before they are educated.</a:t>
+              <a:t>Timing: approximately 4:14.</a:t>
+            </a:r>
+          </a:p>
+          <a:p>
+            <a:r>
+              <a:t>Slide 3 — 01 Look Underneath the Title.</a:t>
+            </a:r>
+          </a:p>
+          <a:p>
+            <a:r>
+              <a:t>Cue — the line that lands on this slide: “The first one is to look underneath your title.”</a:t>
+            </a:r>
+          </a:p>
+          <a:p>
+            <a:r>
+              <a:t>Section break only. Four words on screen, then straight through.</a:t>
+            </a:r>
+          </a:p>
+          <a:p>
+            <a:r>
+              <a:t>The framework does not arrive until here, about four minutes in, and that is deliberate. Recognition first. Do not move this earlier in the edit.</a:t>
+            </a:r>
+          </a:p>
+          <a:p>
+            <a:r>
+              <a:t>Single state. Reveal frame 3 in the build deck.</a:t>
             </a:r>
           </a:p>
         </p:txBody>
@@ -2008,27 +2208,42 @@
           </a:p>
           <a:p>
             <a:r>
-              <a:t>Timing: approximately 3:13.</a:t>
-            </a:r>
-          </a:p>
-          <a:p>
-            <a:r>
-              <a:t>Reveal the three questions as they are asked.</a:t>
-            </a:r>
-          </a:p>
-          <a:p>
-            <a:r>
-              <a:t>"The questions on screen are the ones I use, and I would like you to use them on yourself." Keep her on camera for it.</a:t>
-            </a:r>
-          </a:p>
-          <a:p>
-            <a:r>
-              <a:t>The warning in this section is "a word is not evidence". The exercise — three moments where people relied on your judgment, then the verb that repeats — is the practical core. Give it room.</a:t>
-            </a:r>
-          </a:p>
-          <a:p>
-            <a:r>
-              <a:t>Close on the boundary: capability can travel while the context still has to be learned. "That is not starting from zero. That is bringing something proven into a real learning curve." </a:t>
+              <a:t>Timing: approximately 4:18.</a:t>
+            </a:r>
+          </a:p>
+          <a:p>
+            <a:r>
+              <a:t>Slide 4 — Move One.</a:t>
+            </a:r>
+          </a:p>
+          <a:p>
+            <a:r>
+              <a:t>Cue — the line that lands on this slide: “Your title tells people where your work sat.”</a:t>
+            </a:r>
+          </a:p>
+          <a:p>
+            <a:r>
+              <a:t>The three questions reveal one at a time, in the order spoken.</a:t>
+            </a:r>
+          </a:p>
+          <a:p>
+            <a:r>
+              <a:t>“A word is not evidence. Calling yourself strategic proves nothing.” Keep it — it is what stops the exercise turning into résumé language.</a:t>
+            </a:r>
+          </a:p>
+          <a:p>
+            <a:r>
+              <a:t>The verb list is spoken quickly. Do not put five words on screen and hold them; a light single-line treatment is enough.</a:t>
+            </a:r>
+          </a:p>
+          <a:p>
+            <a:r>
+              <a:t>The closing paragraph carries the limit: something can travel while the context still has to be learned. That is the honest boundary in this section. Do not cut it to save time.</a:t>
+            </a:r>
+          </a:p>
+          <a:p>
+            <a:r>
+              <a:t>Reveal states: 3. Reveal frame 4–6 in the build deck.</a:t>
             </a:r>
           </a:p>
         </p:txBody>
@@ -2103,27 +2318,42 @@
           </a:p>
           <a:p>
             <a:r>
-              <a:t>Timing: approximately 3:13.</a:t>
-            </a:r>
-          </a:p>
-          <a:p>
-            <a:r>
-              <a:t>Reveal the three questions as they are asked.</a:t>
-            </a:r>
-          </a:p>
-          <a:p>
-            <a:r>
-              <a:t>"The questions on screen are the ones I use, and I would like you to use them on yourself." Keep her on camera for it.</a:t>
-            </a:r>
-          </a:p>
-          <a:p>
-            <a:r>
-              <a:t>The warning in this section is "a word is not evidence". The exercise — three moments where people relied on your judgment, then the verb that repeats — is the practical core. Give it room.</a:t>
-            </a:r>
-          </a:p>
-          <a:p>
-            <a:r>
-              <a:t>Close on the boundary: capability can travel while the context still has to be learned. "That is not starting from zero. That is bringing something proven into a real learning curve." </a:t>
+              <a:t>Timing: approximately 4:18.</a:t>
+            </a:r>
+          </a:p>
+          <a:p>
+            <a:r>
+              <a:t>Slide 4 — Move One.</a:t>
+            </a:r>
+          </a:p>
+          <a:p>
+            <a:r>
+              <a:t>Cue — the line that lands on this slide: “Your title tells people where your work sat.”</a:t>
+            </a:r>
+          </a:p>
+          <a:p>
+            <a:r>
+              <a:t>The three questions reveal one at a time, in the order spoken.</a:t>
+            </a:r>
+          </a:p>
+          <a:p>
+            <a:r>
+              <a:t>“A word is not evidence. Calling yourself strategic proves nothing.” Keep it — it is what stops the exercise turning into résumé language.</a:t>
+            </a:r>
+          </a:p>
+          <a:p>
+            <a:r>
+              <a:t>The verb list is spoken quickly. Do not put five words on screen and hold them; a light single-line treatment is enough.</a:t>
+            </a:r>
+          </a:p>
+          <a:p>
+            <a:r>
+              <a:t>The closing paragraph carries the limit: something can travel while the context still has to be learned. That is the honest boundary in this section. Do not cut it to save time.</a:t>
+            </a:r>
+          </a:p>
+          <a:p>
+            <a:r>
+              <a:t>Reveal states: 3. Reveal frame 4–6 in the build deck.</a:t>
             </a:r>
           </a:p>
         </p:txBody>
@@ -2198,27 +2428,42 @@
           </a:p>
           <a:p>
             <a:r>
-              <a:t>Timing: approximately 3:13.</a:t>
-            </a:r>
-          </a:p>
-          <a:p>
-            <a:r>
-              <a:t>Reveal the three questions as they are asked.</a:t>
-            </a:r>
-          </a:p>
-          <a:p>
-            <a:r>
-              <a:t>"The questions on screen are the ones I use, and I would like you to use them on yourself." Keep her on camera for it.</a:t>
-            </a:r>
-          </a:p>
-          <a:p>
-            <a:r>
-              <a:t>The warning in this section is "a word is not evidence". The exercise — three moments where people relied on your judgment, then the verb that repeats — is the practical core. Give it room.</a:t>
-            </a:r>
-          </a:p>
-          <a:p>
-            <a:r>
-              <a:t>Close on the boundary: capability can travel while the context still has to be learned. "That is not starting from zero. That is bringing something proven into a real learning curve." </a:t>
+              <a:t>Timing: approximately 4:18.</a:t>
+            </a:r>
+          </a:p>
+          <a:p>
+            <a:r>
+              <a:t>Slide 4 — Move One.</a:t>
+            </a:r>
+          </a:p>
+          <a:p>
+            <a:r>
+              <a:t>Cue — the line that lands on this slide: “Your title tells people where your work sat.”</a:t>
+            </a:r>
+          </a:p>
+          <a:p>
+            <a:r>
+              <a:t>The three questions reveal one at a time, in the order spoken.</a:t>
+            </a:r>
+          </a:p>
+          <a:p>
+            <a:r>
+              <a:t>“A word is not evidence. Calling yourself strategic proves nothing.” Keep it — it is what stops the exercise turning into résumé language.</a:t>
+            </a:r>
+          </a:p>
+          <a:p>
+            <a:r>
+              <a:t>The verb list is spoken quickly. Do not put five words on screen and hold them; a light single-line treatment is enough.</a:t>
+            </a:r>
+          </a:p>
+          <a:p>
+            <a:r>
+              <a:t>The closing paragraph carries the limit: something can travel while the context still has to be learned. That is the honest boundary in this section. Do not cut it to save time.</a:t>
+            </a:r>
+          </a:p>
+          <a:p>
+            <a:r>
+              <a:t>Reveal states: 3. Reveal frame 4–6 in the build deck.</a:t>
             </a:r>
           </a:p>
         </p:txBody>
@@ -2293,12 +2538,27 @@
           </a:p>
           <a:p>
             <a:r>
-              <a:t>Timing: approximately 4:57, holding to about 5:02.</a:t>
-            </a:r>
-          </a:p>
-          <a:p>
-            <a:r>
-              <a:t>Section card. Hold briefly, then back to presenter.</a:t>
+              <a:t>Timing: approximately 5:46.</a:t>
+            </a:r>
+          </a:p>
+          <a:p>
+            <a:r>
+              <a:t>Slide 5 — 02 Explain What the Work Changed.</a:t>
+            </a:r>
+          </a:p>
+          <a:p>
+            <a:r>
+              <a:t>Cue — the line that lands on this slide: “The second practice is to explain what the work changed.”</a:t>
+            </a:r>
+          </a:p>
+          <a:p>
+            <a:r>
+              <a:t>Section break only. Then straight into the before-and-after.</a:t>
+            </a:r>
+          </a:p>
+          <a:p>
+            <a:r>
+              <a:t>Single state. Reveal frame 7 in the build deck.</a:t>
             </a:r>
           </a:p>
         </p:txBody>
@@ -2373,22 +2633,32 @@
           </a:p>
           <a:p>
             <a:r>
-              <a:t>Timing: approximately 5:02.</a:t>
-            </a:r>
-          </a:p>
-          <a:p>
-            <a:r>
-              <a:t>Show the internal description first, then the version that carries.</a:t>
-            </a:r>
-          </a:p>
-          <a:p>
-            <a:r>
-              <a:t>The point is explicitly NOT that a number is better: "That sentence is not better because it has a number in it." Keep that qualifier — it is the whole teaching point of the slide.</a:t>
-            </a:r>
-          </a:p>
-          <a:p>
-            <a:r>
-              <a:t>Three questions follow: what was different because I was there, what became clearer or faster or safer or more possible, and what can I say without stretching it.</a:t>
+              <a:t>Timing: approximately 5:50.</a:t>
+            </a:r>
+          </a:p>
+          <a:p>
+            <a:r>
+              <a:t>Slide 6 — Move Two.</a:t>
+            </a:r>
+          </a:p>
+          <a:p>
+            <a:r>
+              <a:t>Cue — the line that lands on this slide: “You may be describing your projects in language that only works on people who were in the room.”</a:t>
+            </a:r>
+          </a:p>
+          <a:p>
+            <a:r>
+              <a:t>The before line and the after line are the whole point of this slide. Reveal the before, let it sit, then the after.</a:t>
+            </a:r>
+          </a:p>
+          <a:p>
+            <a:r>
+              <a:t>Set them in the same weight. If the after line is styled as the “good” version with colour or emphasis, the comparison stops being honest.</a:t>
+            </a:r>
+          </a:p>
+          <a:p>
+            <a:r>
+              <a:t>Reveal states: 2. Reveal frame 8–9 in the build deck.</a:t>
             </a:r>
           </a:p>
         </p:txBody>
@@ -2463,22 +2733,32 @@
           </a:p>
           <a:p>
             <a:r>
-              <a:t>Timing: approximately 5:02.</a:t>
-            </a:r>
-          </a:p>
-          <a:p>
-            <a:r>
-              <a:t>Show the internal description first, then the version that carries.</a:t>
-            </a:r>
-          </a:p>
-          <a:p>
-            <a:r>
-              <a:t>The point is explicitly NOT that a number is better: "That sentence is not better because it has a number in it." Keep that qualifier — it is the whole teaching point of the slide.</a:t>
-            </a:r>
-          </a:p>
-          <a:p>
-            <a:r>
-              <a:t>Three questions follow: what was different because I was there, what became clearer or faster or safer or more possible, and what can I say without stretching it.</a:t>
+              <a:t>Timing: approximately 5:50.</a:t>
+            </a:r>
+          </a:p>
+          <a:p>
+            <a:r>
+              <a:t>Slide 6 — Move Two.</a:t>
+            </a:r>
+          </a:p>
+          <a:p>
+            <a:r>
+              <a:t>Cue — the line that lands on this slide: “You may be describing your projects in language that only works on people who were in the room.”</a:t>
+            </a:r>
+          </a:p>
+          <a:p>
+            <a:r>
+              <a:t>The before line and the after line are the whole point of this slide. Reveal the before, let it sit, then the after.</a:t>
+            </a:r>
+          </a:p>
+          <a:p>
+            <a:r>
+              <a:t>Set them in the same weight. If the after line is styled as the “good” version with colour or emphasis, the comparison stops being honest.</a:t>
+            </a:r>
+          </a:p>
+          <a:p>
+            <a:r>
+              <a:t>Reveal states: 2. Reveal frame 8–9 in the build deck.</a:t>
             </a:r>
           </a:p>
         </p:txBody>

--- a/deliverables/video-1-slides/out/Video-1-Reveal-Builds_v2.4.pptx
+++ b/deliverables/video-1-slides/out/Video-1-Reveal-Builds_v2.4.pptx
@@ -2653,7 +2653,7 @@
           </a:p>
           <a:p>
             <a:r>
-              <a:t>Set them in the same weight. If the after line is styled as the “good” version with colour or emphasis, the comparison stops being honest.</a:t>
+              <a:t>Set them in the same weight. If the after line is styled as the “good” version with color or emphasis, the comparison stops being honest.</a:t>
             </a:r>
           </a:p>
           <a:p>
@@ -2753,7 +2753,7 @@
           </a:p>
           <a:p>
             <a:r>
-              <a:t>Set them in the same weight. If the after line is styled as the “good” version with colour or emphasis, the comparison stops being honest.</a:t>
+              <a:t>Set them in the same weight. If the after line is styled as the “good” version with color or emphasis, the comparison stops being honest.</a:t>
             </a:r>
           </a:p>
           <a:p>
